--- a/008_HiveMQCloud/Principe.pptx
+++ b/008_HiveMQCloud/Principe.pptx
@@ -4,6 +4,9 @@
   <p:sldMasterIdLst>
     <p:sldMasterId id="2147483648" r:id="rId1"/>
   </p:sldMasterIdLst>
+  <p:notesMasterIdLst>
+    <p:notesMasterId r:id="rId14"/>
+  </p:notesMasterIdLst>
   <p:sldIdLst>
     <p:sldId id="256" r:id="rId2"/>
     <p:sldId id="257" r:id="rId3"/>
@@ -13,6 +16,10 @@
     <p:sldId id="261" r:id="rId7"/>
     <p:sldId id="262" r:id="rId8"/>
     <p:sldId id="263" r:id="rId9"/>
+    <p:sldId id="264" r:id="rId10"/>
+    <p:sldId id="265" r:id="rId11"/>
+    <p:sldId id="266" r:id="rId12"/>
+    <p:sldId id="267" r:id="rId13"/>
   </p:sldIdLst>
   <p:sldSz cx="12192000" cy="6858000"/>
   <p:notesSz cx="6858000" cy="9144000"/>
@@ -117,6 +124,440 @@
     </p:ext>
   </p:extLst>
 </p:presentation>
+</file>
+
+<file path=ppt/notesMasters/notesMaster1.xml><?xml version="1.0" encoding="utf-8"?>
+<p:notesMaster xmlns:a="http://schemas.openxmlformats.org/drawingml/2006/main" xmlns:r="http://schemas.openxmlformats.org/officeDocument/2006/relationships" xmlns:p="http://schemas.openxmlformats.org/presentationml/2006/main">
+  <p:cSld>
+    <p:bg>
+      <p:bgRef idx="1001">
+        <a:schemeClr val="bg1"/>
+      </p:bgRef>
+    </p:bg>
+    <p:spTree>
+      <p:nvGrpSpPr>
+        <p:cNvPr id="1" name=""/>
+        <p:cNvGrpSpPr/>
+        <p:nvPr/>
+      </p:nvGrpSpPr>
+      <p:grpSpPr>
+        <a:xfrm>
+          <a:off x="0" y="0"/>
+          <a:ext cx="0" cy="0"/>
+          <a:chOff x="0" y="0"/>
+          <a:chExt cx="0" cy="0"/>
+        </a:xfrm>
+      </p:grpSpPr>
+      <p:sp>
+        <p:nvSpPr>
+          <p:cNvPr id="2" name="Espace réservé de l'en-tête 1"/>
+          <p:cNvSpPr>
+            <a:spLocks noGrp="1"/>
+          </p:cNvSpPr>
+          <p:nvPr>
+            <p:ph type="hdr" sz="quarter"/>
+          </p:nvPr>
+        </p:nvSpPr>
+        <p:spPr>
+          <a:xfrm>
+            <a:off x="0" y="0"/>
+            <a:ext cx="2971800" cy="458788"/>
+          </a:xfrm>
+          <a:prstGeom prst="rect">
+            <a:avLst/>
+          </a:prstGeom>
+        </p:spPr>
+        <p:txBody>
+          <a:bodyPr vert="horz" lIns="91440" tIns="45720" rIns="91440" bIns="45720" rtlCol="0"/>
+          <a:lstStyle>
+            <a:lvl1pPr algn="l">
+              <a:defRPr sz="1200"/>
+            </a:lvl1pPr>
+          </a:lstStyle>
+          <a:p>
+            <a:endParaRPr lang="fr-CH"/>
+          </a:p>
+        </p:txBody>
+      </p:sp>
+      <p:sp>
+        <p:nvSpPr>
+          <p:cNvPr id="3" name="Espace réservé de la date 2"/>
+          <p:cNvSpPr>
+            <a:spLocks noGrp="1"/>
+          </p:cNvSpPr>
+          <p:nvPr>
+            <p:ph type="dt" idx="1"/>
+          </p:nvPr>
+        </p:nvSpPr>
+        <p:spPr>
+          <a:xfrm>
+            <a:off x="3884613" y="0"/>
+            <a:ext cx="2971800" cy="458788"/>
+          </a:xfrm>
+          <a:prstGeom prst="rect">
+            <a:avLst/>
+          </a:prstGeom>
+        </p:spPr>
+        <p:txBody>
+          <a:bodyPr vert="horz" lIns="91440" tIns="45720" rIns="91440" bIns="45720" rtlCol="0"/>
+          <a:lstStyle>
+            <a:lvl1pPr algn="r">
+              <a:defRPr sz="1200"/>
+            </a:lvl1pPr>
+          </a:lstStyle>
+          <a:p>
+            <a:fld id="{C0229285-E711-40B2-80D7-1F4F55FA87D3}" type="datetimeFigureOut">
+              <a:rPr lang="fr-CH" smtClean="0"/>
+              <a:t>22.04.2026</a:t>
+            </a:fld>
+            <a:endParaRPr lang="fr-CH"/>
+          </a:p>
+        </p:txBody>
+      </p:sp>
+      <p:sp>
+        <p:nvSpPr>
+          <p:cNvPr id="4" name="Espace réservé de l'image des diapositives 3"/>
+          <p:cNvSpPr>
+            <a:spLocks noGrp="1" noRot="1" noChangeAspect="1"/>
+          </p:cNvSpPr>
+          <p:nvPr>
+            <p:ph type="sldImg" idx="2"/>
+          </p:nvPr>
+        </p:nvSpPr>
+        <p:spPr>
+          <a:xfrm>
+            <a:off x="685800" y="1143000"/>
+            <a:ext cx="5486400" cy="3086100"/>
+          </a:xfrm>
+          <a:prstGeom prst="rect">
+            <a:avLst/>
+          </a:prstGeom>
+          <a:noFill/>
+          <a:ln w="12700">
+            <a:solidFill>
+              <a:prstClr val="black"/>
+            </a:solidFill>
+          </a:ln>
+        </p:spPr>
+        <p:txBody>
+          <a:bodyPr vert="horz" lIns="91440" tIns="45720" rIns="91440" bIns="45720" rtlCol="0" anchor="ctr"/>
+          <a:lstStyle/>
+          <a:p>
+            <a:endParaRPr lang="fr-CH"/>
+          </a:p>
+        </p:txBody>
+      </p:sp>
+      <p:sp>
+        <p:nvSpPr>
+          <p:cNvPr id="5" name="Espace réservé des notes 4"/>
+          <p:cNvSpPr>
+            <a:spLocks noGrp="1"/>
+          </p:cNvSpPr>
+          <p:nvPr>
+            <p:ph type="body" sz="quarter" idx="3"/>
+          </p:nvPr>
+        </p:nvSpPr>
+        <p:spPr>
+          <a:xfrm>
+            <a:off x="685800" y="4400550"/>
+            <a:ext cx="5486400" cy="3600450"/>
+          </a:xfrm>
+          <a:prstGeom prst="rect">
+            <a:avLst/>
+          </a:prstGeom>
+        </p:spPr>
+        <p:txBody>
+          <a:bodyPr vert="horz" lIns="91440" tIns="45720" rIns="91440" bIns="45720" rtlCol="0"/>
+          <a:lstStyle/>
+          <a:p>
+            <a:pPr lvl="0"/>
+            <a:r>
+              <a:rPr lang="fr-FR"/>
+              <a:t>Cliquez pour modifier les styles du texte du masque</a:t>
+            </a:r>
+          </a:p>
+          <a:p>
+            <a:pPr lvl="1"/>
+            <a:r>
+              <a:rPr lang="fr-FR"/>
+              <a:t>Deuxième niveau</a:t>
+            </a:r>
+          </a:p>
+          <a:p>
+            <a:pPr lvl="2"/>
+            <a:r>
+              <a:rPr lang="fr-FR"/>
+              <a:t>Troisième niveau</a:t>
+            </a:r>
+          </a:p>
+          <a:p>
+            <a:pPr lvl="3"/>
+            <a:r>
+              <a:rPr lang="fr-FR"/>
+              <a:t>Quatrième niveau</a:t>
+            </a:r>
+          </a:p>
+          <a:p>
+            <a:pPr lvl="4"/>
+            <a:r>
+              <a:rPr lang="fr-FR"/>
+              <a:t>Cinquième niveau</a:t>
+            </a:r>
+            <a:endParaRPr lang="fr-CH"/>
+          </a:p>
+        </p:txBody>
+      </p:sp>
+      <p:sp>
+        <p:nvSpPr>
+          <p:cNvPr id="6" name="Espace réservé du pied de page 5"/>
+          <p:cNvSpPr>
+            <a:spLocks noGrp="1"/>
+          </p:cNvSpPr>
+          <p:nvPr>
+            <p:ph type="ftr" sz="quarter" idx="4"/>
+          </p:nvPr>
+        </p:nvSpPr>
+        <p:spPr>
+          <a:xfrm>
+            <a:off x="0" y="8685213"/>
+            <a:ext cx="2971800" cy="458787"/>
+          </a:xfrm>
+          <a:prstGeom prst="rect">
+            <a:avLst/>
+          </a:prstGeom>
+        </p:spPr>
+        <p:txBody>
+          <a:bodyPr vert="horz" lIns="91440" tIns="45720" rIns="91440" bIns="45720" rtlCol="0" anchor="b"/>
+          <a:lstStyle>
+            <a:lvl1pPr algn="l">
+              <a:defRPr sz="1200"/>
+            </a:lvl1pPr>
+          </a:lstStyle>
+          <a:p>
+            <a:endParaRPr lang="fr-CH"/>
+          </a:p>
+        </p:txBody>
+      </p:sp>
+      <p:sp>
+        <p:nvSpPr>
+          <p:cNvPr id="7" name="Espace réservé du numéro de diapositive 6"/>
+          <p:cNvSpPr>
+            <a:spLocks noGrp="1"/>
+          </p:cNvSpPr>
+          <p:nvPr>
+            <p:ph type="sldNum" sz="quarter" idx="5"/>
+          </p:nvPr>
+        </p:nvSpPr>
+        <p:spPr>
+          <a:xfrm>
+            <a:off x="3884613" y="8685213"/>
+            <a:ext cx="2971800" cy="458787"/>
+          </a:xfrm>
+          <a:prstGeom prst="rect">
+            <a:avLst/>
+          </a:prstGeom>
+        </p:spPr>
+        <p:txBody>
+          <a:bodyPr vert="horz" lIns="91440" tIns="45720" rIns="91440" bIns="45720" rtlCol="0" anchor="b"/>
+          <a:lstStyle>
+            <a:lvl1pPr algn="r">
+              <a:defRPr sz="1200"/>
+            </a:lvl1pPr>
+          </a:lstStyle>
+          <a:p>
+            <a:fld id="{927E6053-C78D-4FA5-B1EC-9E0AECC30656}" type="slidenum">
+              <a:rPr lang="fr-CH" smtClean="0"/>
+              <a:t>‹N°›</a:t>
+            </a:fld>
+            <a:endParaRPr lang="fr-CH"/>
+          </a:p>
+        </p:txBody>
+      </p:sp>
+    </p:spTree>
+    <p:extLst>
+      <p:ext uri="{BB962C8B-B14F-4D97-AF65-F5344CB8AC3E}">
+        <p14:creationId xmlns:p14="http://schemas.microsoft.com/office/powerpoint/2010/main" val="200517718"/>
+      </p:ext>
+    </p:extLst>
+  </p:cSld>
+  <p:clrMap bg1="lt1" tx1="dk1" bg2="lt2" tx2="dk2" accent1="accent1" accent2="accent2" accent3="accent3" accent4="accent4" accent5="accent5" accent6="accent6" hlink="hlink" folHlink="folHlink"/>
+  <p:notesStyle>
+    <a:lvl1pPr marL="0" algn="l" defTabSz="914400" rtl="0" eaLnBrk="1" latinLnBrk="0" hangingPunct="1">
+      <a:defRPr sz="1200" kern="1200">
+        <a:solidFill>
+          <a:schemeClr val="tx1"/>
+        </a:solidFill>
+        <a:latin typeface="+mn-lt"/>
+        <a:ea typeface="+mn-ea"/>
+        <a:cs typeface="+mn-cs"/>
+      </a:defRPr>
+    </a:lvl1pPr>
+    <a:lvl2pPr marL="457200" algn="l" defTabSz="914400" rtl="0" eaLnBrk="1" latinLnBrk="0" hangingPunct="1">
+      <a:defRPr sz="1200" kern="1200">
+        <a:solidFill>
+          <a:schemeClr val="tx1"/>
+        </a:solidFill>
+        <a:latin typeface="+mn-lt"/>
+        <a:ea typeface="+mn-ea"/>
+        <a:cs typeface="+mn-cs"/>
+      </a:defRPr>
+    </a:lvl2pPr>
+    <a:lvl3pPr marL="914400" algn="l" defTabSz="914400" rtl="0" eaLnBrk="1" latinLnBrk="0" hangingPunct="1">
+      <a:defRPr sz="1200" kern="1200">
+        <a:solidFill>
+          <a:schemeClr val="tx1"/>
+        </a:solidFill>
+        <a:latin typeface="+mn-lt"/>
+        <a:ea typeface="+mn-ea"/>
+        <a:cs typeface="+mn-cs"/>
+      </a:defRPr>
+    </a:lvl3pPr>
+    <a:lvl4pPr marL="1371600" algn="l" defTabSz="914400" rtl="0" eaLnBrk="1" latinLnBrk="0" hangingPunct="1">
+      <a:defRPr sz="1200" kern="1200">
+        <a:solidFill>
+          <a:schemeClr val="tx1"/>
+        </a:solidFill>
+        <a:latin typeface="+mn-lt"/>
+        <a:ea typeface="+mn-ea"/>
+        <a:cs typeface="+mn-cs"/>
+      </a:defRPr>
+    </a:lvl4pPr>
+    <a:lvl5pPr marL="1828800" algn="l" defTabSz="914400" rtl="0" eaLnBrk="1" latinLnBrk="0" hangingPunct="1">
+      <a:defRPr sz="1200" kern="1200">
+        <a:solidFill>
+          <a:schemeClr val="tx1"/>
+        </a:solidFill>
+        <a:latin typeface="+mn-lt"/>
+        <a:ea typeface="+mn-ea"/>
+        <a:cs typeface="+mn-cs"/>
+      </a:defRPr>
+    </a:lvl5pPr>
+    <a:lvl6pPr marL="2286000" algn="l" defTabSz="914400" rtl="0" eaLnBrk="1" latinLnBrk="0" hangingPunct="1">
+      <a:defRPr sz="1200" kern="1200">
+        <a:solidFill>
+          <a:schemeClr val="tx1"/>
+        </a:solidFill>
+        <a:latin typeface="+mn-lt"/>
+        <a:ea typeface="+mn-ea"/>
+        <a:cs typeface="+mn-cs"/>
+      </a:defRPr>
+    </a:lvl6pPr>
+    <a:lvl7pPr marL="2743200" algn="l" defTabSz="914400" rtl="0" eaLnBrk="1" latinLnBrk="0" hangingPunct="1">
+      <a:defRPr sz="1200" kern="1200">
+        <a:solidFill>
+          <a:schemeClr val="tx1"/>
+        </a:solidFill>
+        <a:latin typeface="+mn-lt"/>
+        <a:ea typeface="+mn-ea"/>
+        <a:cs typeface="+mn-cs"/>
+      </a:defRPr>
+    </a:lvl7pPr>
+    <a:lvl8pPr marL="3200400" algn="l" defTabSz="914400" rtl="0" eaLnBrk="1" latinLnBrk="0" hangingPunct="1">
+      <a:defRPr sz="1200" kern="1200">
+        <a:solidFill>
+          <a:schemeClr val="tx1"/>
+        </a:solidFill>
+        <a:latin typeface="+mn-lt"/>
+        <a:ea typeface="+mn-ea"/>
+        <a:cs typeface="+mn-cs"/>
+      </a:defRPr>
+    </a:lvl8pPr>
+    <a:lvl9pPr marL="3657600" algn="l" defTabSz="914400" rtl="0" eaLnBrk="1" latinLnBrk="0" hangingPunct="1">
+      <a:defRPr sz="1200" kern="1200">
+        <a:solidFill>
+          <a:schemeClr val="tx1"/>
+        </a:solidFill>
+        <a:latin typeface="+mn-lt"/>
+        <a:ea typeface="+mn-ea"/>
+        <a:cs typeface="+mn-cs"/>
+      </a:defRPr>
+    </a:lvl9pPr>
+  </p:notesStyle>
+</p:notesMaster>
+</file>
+
+<file path=ppt/notesSlides/notesSlide1.xml><?xml version="1.0" encoding="utf-8"?>
+<p:notes xmlns:a="http://schemas.openxmlformats.org/drawingml/2006/main" xmlns:r="http://schemas.openxmlformats.org/officeDocument/2006/relationships" xmlns:p="http://schemas.openxmlformats.org/presentationml/2006/main">
+  <p:cSld>
+    <p:spTree>
+      <p:nvGrpSpPr>
+        <p:cNvPr id="1" name=""/>
+        <p:cNvGrpSpPr/>
+        <p:nvPr/>
+      </p:nvGrpSpPr>
+      <p:grpSpPr>
+        <a:xfrm>
+          <a:off x="0" y="0"/>
+          <a:ext cx="0" cy="0"/>
+          <a:chOff x="0" y="0"/>
+          <a:chExt cx="0" cy="0"/>
+        </a:xfrm>
+      </p:grpSpPr>
+      <p:sp>
+        <p:nvSpPr>
+          <p:cNvPr id="2" name="Espace réservé de l'image des diapositives 1"/>
+          <p:cNvSpPr>
+            <a:spLocks noGrp="1" noRot="1" noChangeAspect="1"/>
+          </p:cNvSpPr>
+          <p:nvPr>
+            <p:ph type="sldImg"/>
+          </p:nvPr>
+        </p:nvSpPr>
+        <p:spPr/>
+      </p:sp>
+      <p:sp>
+        <p:nvSpPr>
+          <p:cNvPr id="3" name="Espace réservé des notes 2"/>
+          <p:cNvSpPr>
+            <a:spLocks noGrp="1"/>
+          </p:cNvSpPr>
+          <p:nvPr>
+            <p:ph type="body" idx="1"/>
+          </p:nvPr>
+        </p:nvSpPr>
+        <p:spPr/>
+        <p:txBody>
+          <a:bodyPr/>
+          <a:lstStyle/>
+          <a:p>
+            <a:endParaRPr lang="fr-CH" dirty="0"/>
+          </a:p>
+        </p:txBody>
+      </p:sp>
+      <p:sp>
+        <p:nvSpPr>
+          <p:cNvPr id="4" name="Espace réservé du numéro de diapositive 3"/>
+          <p:cNvSpPr>
+            <a:spLocks noGrp="1"/>
+          </p:cNvSpPr>
+          <p:nvPr>
+            <p:ph type="sldNum" sz="quarter" idx="5"/>
+          </p:nvPr>
+        </p:nvSpPr>
+        <p:spPr/>
+        <p:txBody>
+          <a:bodyPr/>
+          <a:lstStyle/>
+          <a:p>
+            <a:fld id="{927E6053-C78D-4FA5-B1EC-9E0AECC30656}" type="slidenum">
+              <a:rPr lang="fr-CH" smtClean="0"/>
+              <a:t>9</a:t>
+            </a:fld>
+            <a:endParaRPr lang="fr-CH"/>
+          </a:p>
+        </p:txBody>
+      </p:sp>
+    </p:spTree>
+    <p:extLst>
+      <p:ext uri="{BB962C8B-B14F-4D97-AF65-F5344CB8AC3E}">
+        <p14:creationId xmlns:p14="http://schemas.microsoft.com/office/powerpoint/2010/main" val="3776191534"/>
+      </p:ext>
+    </p:extLst>
+  </p:cSld>
+  <p:clrMapOvr>
+    <a:masterClrMapping/>
+  </p:clrMapOvr>
+</p:notes>
 </file>
 
 <file path=ppt/slideLayouts/slideLayout1.xml><?xml version="1.0" encoding="utf-8"?>
@@ -3439,6 +3880,3372 @@
 </p:sld>
 </file>
 
+<file path=ppt/slides/slide10.xml><?xml version="1.0" encoding="utf-8"?>
+<p:sld xmlns:a="http://schemas.openxmlformats.org/drawingml/2006/main" xmlns:r="http://schemas.openxmlformats.org/officeDocument/2006/relationships" xmlns:p="http://schemas.openxmlformats.org/presentationml/2006/main">
+  <p:cSld>
+    <p:spTree>
+      <p:nvGrpSpPr>
+        <p:cNvPr id="1" name=""/>
+        <p:cNvGrpSpPr/>
+        <p:nvPr/>
+      </p:nvGrpSpPr>
+      <p:grpSpPr>
+        <a:xfrm>
+          <a:off x="0" y="0"/>
+          <a:ext cx="0" cy="0"/>
+          <a:chOff x="0" y="0"/>
+          <a:chExt cx="0" cy="0"/>
+        </a:xfrm>
+      </p:grpSpPr>
+      <p:sp>
+        <p:nvSpPr>
+          <p:cNvPr id="2" name="Titre 1">
+            <a:extLst>
+              <a:ext uri="{FF2B5EF4-FFF2-40B4-BE49-F238E27FC236}">
+                <a16:creationId xmlns:a16="http://schemas.microsoft.com/office/drawing/2014/main" id="{194227F7-1B82-48AF-B06E-E0E7CC4D6239}"/>
+              </a:ext>
+            </a:extLst>
+          </p:cNvPr>
+          <p:cNvSpPr>
+            <a:spLocks noGrp="1"/>
+          </p:cNvSpPr>
+          <p:nvPr>
+            <p:ph type="title"/>
+          </p:nvPr>
+        </p:nvSpPr>
+        <p:spPr/>
+        <p:txBody>
+          <a:bodyPr/>
+          <a:lstStyle/>
+          <a:p>
+            <a:r>
+              <a:rPr lang="fr-CH" dirty="0"/>
+              <a:t>Internet layer</a:t>
+            </a:r>
+          </a:p>
+        </p:txBody>
+      </p:sp>
+      <p:sp>
+        <p:nvSpPr>
+          <p:cNvPr id="4" name="Rectangle 1">
+            <a:extLst>
+              <a:ext uri="{FF2B5EF4-FFF2-40B4-BE49-F238E27FC236}">
+                <a16:creationId xmlns:a16="http://schemas.microsoft.com/office/drawing/2014/main" id="{213FB054-AC0F-B9D8-FDC7-6FBCAFF6FF32}"/>
+              </a:ext>
+            </a:extLst>
+          </p:cNvPr>
+          <p:cNvSpPr>
+            <a:spLocks noGrp="1" noChangeArrowheads="1"/>
+          </p:cNvSpPr>
+          <p:nvPr>
+            <p:ph idx="1"/>
+          </p:nvPr>
+        </p:nvSpPr>
+        <p:spPr bwMode="auto">
+          <a:prstGeom prst="rect">
+            <a:avLst/>
+          </a:prstGeom>
+          <a:noFill/>
+          <a:ln>
+            <a:noFill/>
+          </a:ln>
+          <a:effectLst/>
+          <a:extLst>
+            <a:ext uri="{909E8E84-426E-40DD-AFC4-6F175D3DCCD1}">
+              <a14:hiddenFill xmlns:a14="http://schemas.microsoft.com/office/drawing/2010/main">
+                <a:solidFill>
+                  <a:schemeClr val="accent1"/>
+                </a:solidFill>
+              </a14:hiddenFill>
+            </a:ext>
+            <a:ext uri="{91240B29-F687-4F45-9708-019B960494DF}">
+              <a14:hiddenLine xmlns:a14="http://schemas.microsoft.com/office/drawing/2010/main" w="9525">
+                <a:solidFill>
+                  <a:schemeClr val="tx1"/>
+                </a:solidFill>
+                <a:miter lim="800000"/>
+                <a:headEnd/>
+                <a:tailEnd/>
+              </a14:hiddenLine>
+            </a:ext>
+            <a:ext uri="{AF507438-7753-43E0-B8FC-AC1667EBCBE1}">
+              <a14:hiddenEffects xmlns:a14="http://schemas.microsoft.com/office/drawing/2010/main">
+                <a:effectLst>
+                  <a:outerShdw dist="35921" dir="2700000" algn="ctr" rotWithShape="0">
+                    <a:schemeClr val="bg2"/>
+                  </a:outerShdw>
+                </a:effectLst>
+              </a14:hiddenEffects>
+            </a:ext>
+          </a:extLst>
+        </p:spPr>
+        <p:txBody>
+          <a:bodyPr vert="horz" wrap="none" lIns="91440" tIns="45720" rIns="91440" bIns="45720" numCol="1" anchor="ctr" anchorCtr="0" compatLnSpc="1">
+            <a:prstTxWarp prst="textNoShape">
+              <a:avLst/>
+            </a:prstTxWarp>
+            <a:spAutoFit/>
+          </a:bodyPr>
+          <a:lstStyle/>
+          <a:p>
+            <a:pPr marL="0" marR="0" lvl="0" indent="0" algn="l" defTabSz="914400" rtl="0" eaLnBrk="0" fontAlgn="base" latinLnBrk="0" hangingPunct="0">
+              <a:lnSpc>
+                <a:spcPct val="100000"/>
+              </a:lnSpc>
+              <a:spcBef>
+                <a:spcPct val="0"/>
+              </a:spcBef>
+              <a:spcAft>
+                <a:spcPct val="0"/>
+              </a:spcAft>
+              <a:buClrTx/>
+              <a:buSzTx/>
+              <a:buFontTx/>
+              <a:buChar char="•"/>
+              <a:tabLst/>
+            </a:pPr>
+            <a:r>
+              <a:rPr kumimoji="0" lang="fr-FR" altLang="fr-FR" sz="1800" b="1" i="0" u="none" strike="noStrike" cap="none" normalizeH="0" baseline="0" dirty="0">
+                <a:ln>
+                  <a:noFill/>
+                </a:ln>
+                <a:solidFill>
+                  <a:schemeClr val="tx1"/>
+                </a:solidFill>
+                <a:effectLst/>
+                <a:latin typeface="Arial" panose="020B0604020202020204" pitchFamily="34" charset="0"/>
+              </a:rPr>
+              <a:t>MQTT:</a:t>
+            </a:r>
+            <a:r>
+              <a:rPr kumimoji="0" lang="fr-FR" altLang="fr-FR" sz="1800" b="0" i="0" u="none" strike="noStrike" cap="none" normalizeH="0" baseline="0" dirty="0">
+                <a:ln>
+                  <a:noFill/>
+                </a:ln>
+                <a:solidFill>
+                  <a:schemeClr val="tx1"/>
+                </a:solidFill>
+                <a:effectLst/>
+                <a:latin typeface="Arial" panose="020B0604020202020204" pitchFamily="34" charset="0"/>
+              </a:rPr>
+              <a:t> The </a:t>
+            </a:r>
+            <a:r>
+              <a:rPr kumimoji="0" lang="fr-FR" altLang="fr-FR" sz="1800" b="1" i="0" u="none" strike="noStrike" cap="none" normalizeH="0" baseline="0" dirty="0">
+                <a:ln>
+                  <a:noFill/>
+                </a:ln>
+                <a:solidFill>
+                  <a:schemeClr val="tx1"/>
+                </a:solidFill>
+                <a:effectLst/>
+                <a:latin typeface="Arial" panose="020B0604020202020204" pitchFamily="34" charset="0"/>
+              </a:rPr>
+              <a:t>Application</a:t>
+            </a:r>
+            <a:r>
+              <a:rPr kumimoji="0" lang="fr-FR" altLang="fr-FR" sz="1800" b="0" i="0" u="none" strike="noStrike" cap="none" normalizeH="0" baseline="0" dirty="0">
+                <a:ln>
+                  <a:noFill/>
+                </a:ln>
+                <a:solidFill>
+                  <a:schemeClr val="tx1"/>
+                </a:solidFill>
+                <a:effectLst/>
+                <a:latin typeface="Arial" panose="020B0604020202020204" pitchFamily="34" charset="0"/>
+              </a:rPr>
+              <a:t> layer (The "</a:t>
+            </a:r>
+            <a:r>
+              <a:rPr kumimoji="0" lang="fr-FR" altLang="fr-FR" sz="1800" b="0" i="0" u="none" strike="noStrike" cap="none" normalizeH="0" baseline="0" dirty="0" err="1">
+                <a:ln>
+                  <a:noFill/>
+                </a:ln>
+                <a:solidFill>
+                  <a:schemeClr val="tx1"/>
+                </a:solidFill>
+                <a:effectLst/>
+                <a:latin typeface="Arial" panose="020B0604020202020204" pitchFamily="34" charset="0"/>
+              </a:rPr>
+              <a:t>what</a:t>
+            </a:r>
+            <a:r>
+              <a:rPr kumimoji="0" lang="fr-FR" altLang="fr-FR" sz="1800" b="0" i="0" u="none" strike="noStrike" cap="none" normalizeH="0" baseline="0" dirty="0">
+                <a:ln>
+                  <a:noFill/>
+                </a:ln>
+                <a:solidFill>
+                  <a:schemeClr val="tx1"/>
+                </a:solidFill>
+                <a:effectLst/>
+                <a:latin typeface="Arial" panose="020B0604020202020204" pitchFamily="34" charset="0"/>
+              </a:rPr>
+              <a:t>" — </a:t>
+            </a:r>
+            <a:r>
+              <a:rPr kumimoji="0" lang="fr-FR" altLang="fr-FR" sz="1800" b="0" i="0" u="none" strike="noStrike" cap="none" normalizeH="0" baseline="0" dirty="0" err="1">
+                <a:ln>
+                  <a:noFill/>
+                </a:ln>
+                <a:solidFill>
+                  <a:schemeClr val="tx1"/>
+                </a:solidFill>
+                <a:effectLst/>
+                <a:latin typeface="Arial" panose="020B0604020202020204" pitchFamily="34" charset="0"/>
+              </a:rPr>
+              <a:t>your</a:t>
+            </a:r>
+            <a:r>
+              <a:rPr kumimoji="0" lang="fr-FR" altLang="fr-FR" sz="1800" b="0" i="0" u="none" strike="noStrike" cap="none" normalizeH="0" baseline="0" dirty="0">
+                <a:ln>
+                  <a:noFill/>
+                </a:ln>
+                <a:solidFill>
+                  <a:schemeClr val="tx1"/>
+                </a:solidFill>
+                <a:effectLst/>
+                <a:latin typeface="Arial" panose="020B0604020202020204" pitchFamily="34" charset="0"/>
+              </a:rPr>
+              <a:t> boiler data).</a:t>
+            </a:r>
+          </a:p>
+          <a:p>
+            <a:pPr marL="0" marR="0" lvl="0" indent="0" algn="l" defTabSz="914400" rtl="0" eaLnBrk="0" fontAlgn="base" latinLnBrk="0" hangingPunct="0">
+              <a:lnSpc>
+                <a:spcPct val="100000"/>
+              </a:lnSpc>
+              <a:spcBef>
+                <a:spcPct val="0"/>
+              </a:spcBef>
+              <a:spcAft>
+                <a:spcPct val="0"/>
+              </a:spcAft>
+              <a:buClrTx/>
+              <a:buSzTx/>
+              <a:buFontTx/>
+              <a:buChar char="•"/>
+              <a:tabLst/>
+            </a:pPr>
+            <a:r>
+              <a:rPr kumimoji="0" lang="fr-FR" altLang="fr-FR" sz="1800" b="1" i="0" u="none" strike="noStrike" cap="none" normalizeH="0" baseline="0" dirty="0">
+                <a:ln>
+                  <a:noFill/>
+                </a:ln>
+                <a:solidFill>
+                  <a:schemeClr val="tx1"/>
+                </a:solidFill>
+                <a:effectLst/>
+                <a:latin typeface="Arial" panose="020B0604020202020204" pitchFamily="34" charset="0"/>
+              </a:rPr>
+              <a:t>SSL/TLS:</a:t>
+            </a:r>
+            <a:r>
+              <a:rPr kumimoji="0" lang="fr-FR" altLang="fr-FR" sz="1800" b="0" i="0" u="none" strike="noStrike" cap="none" normalizeH="0" baseline="0" dirty="0">
+                <a:ln>
+                  <a:noFill/>
+                </a:ln>
+                <a:solidFill>
+                  <a:schemeClr val="tx1"/>
+                </a:solidFill>
+                <a:effectLst/>
+                <a:latin typeface="Arial" panose="020B0604020202020204" pitchFamily="34" charset="0"/>
+              </a:rPr>
+              <a:t> The </a:t>
+            </a:r>
+            <a:r>
+              <a:rPr kumimoji="0" lang="fr-FR" altLang="fr-FR" sz="1800" b="1" i="0" u="none" strike="noStrike" cap="none" normalizeH="0" baseline="0" dirty="0">
+                <a:ln>
+                  <a:noFill/>
+                </a:ln>
+                <a:solidFill>
+                  <a:schemeClr val="tx1"/>
+                </a:solidFill>
+                <a:effectLst/>
+                <a:latin typeface="Arial" panose="020B0604020202020204" pitchFamily="34" charset="0"/>
+              </a:rPr>
+              <a:t>Security</a:t>
+            </a:r>
+            <a:r>
+              <a:rPr kumimoji="0" lang="fr-FR" altLang="fr-FR" sz="1800" b="0" i="0" u="none" strike="noStrike" cap="none" normalizeH="0" baseline="0" dirty="0">
+                <a:ln>
+                  <a:noFill/>
+                </a:ln>
+                <a:solidFill>
+                  <a:schemeClr val="tx1"/>
+                </a:solidFill>
+                <a:effectLst/>
+                <a:latin typeface="Arial" panose="020B0604020202020204" pitchFamily="34" charset="0"/>
+              </a:rPr>
+              <a:t> layer (The "how </a:t>
+            </a:r>
+            <a:r>
+              <a:rPr kumimoji="0" lang="fr-FR" altLang="fr-FR" sz="1800" b="0" i="0" u="none" strike="noStrike" cap="none" normalizeH="0" baseline="0" dirty="0" err="1">
+                <a:ln>
+                  <a:noFill/>
+                </a:ln>
+                <a:solidFill>
+                  <a:schemeClr val="tx1"/>
+                </a:solidFill>
+                <a:effectLst/>
+                <a:latin typeface="Arial" panose="020B0604020202020204" pitchFamily="34" charset="0"/>
+              </a:rPr>
+              <a:t>safe</a:t>
+            </a:r>
+            <a:r>
+              <a:rPr kumimoji="0" lang="fr-FR" altLang="fr-FR" sz="1800" b="0" i="0" u="none" strike="noStrike" cap="none" normalizeH="0" baseline="0" dirty="0">
+                <a:ln>
+                  <a:noFill/>
+                </a:ln>
+                <a:solidFill>
+                  <a:schemeClr val="tx1"/>
+                </a:solidFill>
+                <a:effectLst/>
+                <a:latin typeface="Arial" panose="020B0604020202020204" pitchFamily="34" charset="0"/>
+              </a:rPr>
+              <a:t>" — the </a:t>
+            </a:r>
+            <a:r>
+              <a:rPr kumimoji="0" lang="fr-FR" altLang="fr-FR" sz="1800" b="0" i="0" u="none" strike="noStrike" cap="none" normalizeH="0" baseline="0" dirty="0" err="1">
+                <a:ln>
+                  <a:noFill/>
+                </a:ln>
+                <a:solidFill>
+                  <a:schemeClr val="tx1"/>
+                </a:solidFill>
+                <a:effectLst/>
+                <a:latin typeface="Arial" panose="020B0604020202020204" pitchFamily="34" charset="0"/>
+              </a:rPr>
+              <a:t>encryption</a:t>
+            </a:r>
+            <a:r>
+              <a:rPr kumimoji="0" lang="fr-FR" altLang="fr-FR" sz="1800" b="0" i="0" u="none" strike="noStrike" cap="none" normalizeH="0" baseline="0" dirty="0">
+                <a:ln>
+                  <a:noFill/>
+                </a:ln>
+                <a:solidFill>
+                  <a:schemeClr val="tx1"/>
+                </a:solidFill>
+                <a:effectLst/>
+                <a:latin typeface="Arial" panose="020B0604020202020204" pitchFamily="34" charset="0"/>
+              </a:rPr>
+              <a:t>).</a:t>
+            </a:r>
+          </a:p>
+          <a:p>
+            <a:pPr marL="0" marR="0" lvl="0" indent="0" algn="l" defTabSz="914400" rtl="0" eaLnBrk="0" fontAlgn="base" latinLnBrk="0" hangingPunct="0">
+              <a:lnSpc>
+                <a:spcPct val="100000"/>
+              </a:lnSpc>
+              <a:spcBef>
+                <a:spcPct val="0"/>
+              </a:spcBef>
+              <a:spcAft>
+                <a:spcPct val="0"/>
+              </a:spcAft>
+              <a:buClrTx/>
+              <a:buSzTx/>
+              <a:buFontTx/>
+              <a:buChar char="•"/>
+              <a:tabLst/>
+            </a:pPr>
+            <a:r>
+              <a:rPr kumimoji="0" lang="fr-FR" altLang="fr-FR" sz="1800" b="1" i="0" u="none" strike="noStrike" cap="none" normalizeH="0" baseline="0" dirty="0">
+                <a:ln>
+                  <a:noFill/>
+                </a:ln>
+                <a:solidFill>
+                  <a:schemeClr val="tx1"/>
+                </a:solidFill>
+                <a:effectLst/>
+                <a:latin typeface="Arial" panose="020B0604020202020204" pitchFamily="34" charset="0"/>
+              </a:rPr>
+              <a:t>TCP:</a:t>
+            </a:r>
+            <a:r>
+              <a:rPr kumimoji="0" lang="fr-FR" altLang="fr-FR" sz="1800" b="0" i="0" u="none" strike="noStrike" cap="none" normalizeH="0" baseline="0" dirty="0">
+                <a:ln>
+                  <a:noFill/>
+                </a:ln>
+                <a:solidFill>
+                  <a:schemeClr val="tx1"/>
+                </a:solidFill>
+                <a:effectLst/>
+                <a:latin typeface="Arial" panose="020B0604020202020204" pitchFamily="34" charset="0"/>
+              </a:rPr>
+              <a:t> The </a:t>
+            </a:r>
+            <a:r>
+              <a:rPr kumimoji="0" lang="fr-FR" altLang="fr-FR" sz="1800" b="1" i="0" u="none" strike="noStrike" cap="none" normalizeH="0" baseline="0" dirty="0">
+                <a:ln>
+                  <a:noFill/>
+                </a:ln>
+                <a:solidFill>
+                  <a:schemeClr val="tx1"/>
+                </a:solidFill>
+                <a:effectLst/>
+                <a:latin typeface="Arial" panose="020B0604020202020204" pitchFamily="34" charset="0"/>
+              </a:rPr>
+              <a:t>Transport</a:t>
+            </a:r>
+            <a:r>
+              <a:rPr kumimoji="0" lang="fr-FR" altLang="fr-FR" sz="1800" b="0" i="0" u="none" strike="noStrike" cap="none" normalizeH="0" baseline="0" dirty="0">
+                <a:ln>
+                  <a:noFill/>
+                </a:ln>
+                <a:solidFill>
+                  <a:schemeClr val="tx1"/>
+                </a:solidFill>
+                <a:effectLst/>
+                <a:latin typeface="Arial" panose="020B0604020202020204" pitchFamily="34" charset="0"/>
+              </a:rPr>
+              <a:t> layer (The "</a:t>
+            </a:r>
+            <a:r>
+              <a:rPr kumimoji="0" lang="fr-FR" altLang="fr-FR" sz="1800" b="0" i="0" u="none" strike="noStrike" cap="none" normalizeH="0" baseline="0" dirty="0" err="1">
+                <a:ln>
+                  <a:noFill/>
+                </a:ln>
+                <a:solidFill>
+                  <a:schemeClr val="tx1"/>
+                </a:solidFill>
+                <a:effectLst/>
+                <a:latin typeface="Arial" panose="020B0604020202020204" pitchFamily="34" charset="0"/>
+              </a:rPr>
+              <a:t>reliability</a:t>
+            </a:r>
+            <a:r>
+              <a:rPr kumimoji="0" lang="fr-FR" altLang="fr-FR" sz="1800" b="0" i="0" u="none" strike="noStrike" cap="none" normalizeH="0" baseline="0" dirty="0">
+                <a:ln>
+                  <a:noFill/>
+                </a:ln>
+                <a:solidFill>
+                  <a:schemeClr val="tx1"/>
+                </a:solidFill>
+                <a:effectLst/>
+                <a:latin typeface="Arial" panose="020B0604020202020204" pitchFamily="34" charset="0"/>
+              </a:rPr>
+              <a:t>" — </a:t>
+            </a:r>
+            <a:r>
+              <a:rPr kumimoji="0" lang="fr-FR" altLang="fr-FR" sz="1800" b="0" i="0" u="none" strike="noStrike" cap="none" normalizeH="0" baseline="0" dirty="0" err="1">
+                <a:ln>
+                  <a:noFill/>
+                </a:ln>
+                <a:solidFill>
+                  <a:schemeClr val="tx1"/>
+                </a:solidFill>
+                <a:effectLst/>
+                <a:latin typeface="Arial" panose="020B0604020202020204" pitchFamily="34" charset="0"/>
+              </a:rPr>
+              <a:t>ensuring</a:t>
+            </a:r>
+            <a:r>
+              <a:rPr kumimoji="0" lang="fr-FR" altLang="fr-FR" sz="1800" b="0" i="0" u="none" strike="noStrike" cap="none" normalizeH="0" baseline="0" dirty="0">
+                <a:ln>
+                  <a:noFill/>
+                </a:ln>
+                <a:solidFill>
+                  <a:schemeClr val="tx1"/>
+                </a:solidFill>
+                <a:effectLst/>
+                <a:latin typeface="Arial" panose="020B0604020202020204" pitchFamily="34" charset="0"/>
+              </a:rPr>
+              <a:t> </a:t>
+            </a:r>
+            <a:r>
+              <a:rPr kumimoji="0" lang="fr-FR" altLang="fr-FR" sz="1800" b="0" i="0" u="none" strike="noStrike" cap="none" normalizeH="0" baseline="0" dirty="0" err="1">
+                <a:ln>
+                  <a:noFill/>
+                </a:ln>
+                <a:solidFill>
+                  <a:schemeClr val="tx1"/>
+                </a:solidFill>
+                <a:effectLst/>
+                <a:latin typeface="Arial" panose="020B0604020202020204" pitchFamily="34" charset="0"/>
+              </a:rPr>
+              <a:t>every</a:t>
+            </a:r>
+            <a:r>
+              <a:rPr kumimoji="0" lang="fr-FR" altLang="fr-FR" sz="1800" b="0" i="0" u="none" strike="noStrike" cap="none" normalizeH="0" baseline="0" dirty="0">
+                <a:ln>
+                  <a:noFill/>
+                </a:ln>
+                <a:solidFill>
+                  <a:schemeClr val="tx1"/>
+                </a:solidFill>
+                <a:effectLst/>
+                <a:latin typeface="Arial" panose="020B0604020202020204" pitchFamily="34" charset="0"/>
+              </a:rPr>
+              <a:t> </a:t>
+            </a:r>
+            <a:r>
+              <a:rPr kumimoji="0" lang="fr-FR" altLang="fr-FR" sz="1800" b="0" i="0" u="none" strike="noStrike" cap="none" normalizeH="0" baseline="0" dirty="0" err="1">
+                <a:ln>
+                  <a:noFill/>
+                </a:ln>
+                <a:solidFill>
+                  <a:schemeClr val="tx1"/>
+                </a:solidFill>
+                <a:effectLst/>
+                <a:latin typeface="Arial" panose="020B0604020202020204" pitchFamily="34" charset="0"/>
+              </a:rPr>
+              <a:t>packet</a:t>
+            </a:r>
+            <a:r>
+              <a:rPr kumimoji="0" lang="fr-FR" altLang="fr-FR" sz="1800" b="0" i="0" u="none" strike="noStrike" cap="none" normalizeH="0" baseline="0" dirty="0">
+                <a:ln>
+                  <a:noFill/>
+                </a:ln>
+                <a:solidFill>
+                  <a:schemeClr val="tx1"/>
+                </a:solidFill>
+                <a:effectLst/>
+                <a:latin typeface="Arial" panose="020B0604020202020204" pitchFamily="34" charset="0"/>
+              </a:rPr>
+              <a:t> arrives in </a:t>
+            </a:r>
+            <a:r>
+              <a:rPr kumimoji="0" lang="fr-FR" altLang="fr-FR" sz="1800" b="0" i="0" u="none" strike="noStrike" cap="none" normalizeH="0" baseline="0" dirty="0" err="1">
+                <a:ln>
+                  <a:noFill/>
+                </a:ln>
+                <a:solidFill>
+                  <a:schemeClr val="tx1"/>
+                </a:solidFill>
+                <a:effectLst/>
+                <a:latin typeface="Arial" panose="020B0604020202020204" pitchFamily="34" charset="0"/>
+              </a:rPr>
+              <a:t>order</a:t>
+            </a:r>
+            <a:r>
+              <a:rPr kumimoji="0" lang="fr-FR" altLang="fr-FR" sz="1800" b="0" i="0" u="none" strike="noStrike" cap="none" normalizeH="0" baseline="0" dirty="0">
+                <a:ln>
+                  <a:noFill/>
+                </a:ln>
+                <a:solidFill>
+                  <a:schemeClr val="tx1"/>
+                </a:solidFill>
+                <a:effectLst/>
+                <a:latin typeface="Arial" panose="020B0604020202020204" pitchFamily="34" charset="0"/>
+              </a:rPr>
+              <a:t>).</a:t>
+            </a:r>
+          </a:p>
+          <a:p>
+            <a:pPr marL="0" marR="0" lvl="0" indent="0" algn="l" defTabSz="914400" rtl="0" eaLnBrk="0" fontAlgn="base" latinLnBrk="0" hangingPunct="0">
+              <a:lnSpc>
+                <a:spcPct val="100000"/>
+              </a:lnSpc>
+              <a:spcBef>
+                <a:spcPct val="0"/>
+              </a:spcBef>
+              <a:spcAft>
+                <a:spcPct val="0"/>
+              </a:spcAft>
+              <a:buClrTx/>
+              <a:buSzTx/>
+              <a:buFontTx/>
+              <a:buChar char="•"/>
+              <a:tabLst/>
+            </a:pPr>
+            <a:r>
+              <a:rPr kumimoji="0" lang="fr-FR" altLang="fr-FR" sz="1800" b="1" i="0" u="none" strike="noStrike" cap="none" normalizeH="0" baseline="0" dirty="0">
+                <a:ln>
+                  <a:noFill/>
+                </a:ln>
+                <a:solidFill>
+                  <a:schemeClr val="tx1"/>
+                </a:solidFill>
+                <a:effectLst/>
+                <a:latin typeface="Arial" panose="020B0604020202020204" pitchFamily="34" charset="0"/>
+              </a:rPr>
+              <a:t>IP:</a:t>
+            </a:r>
+            <a:r>
+              <a:rPr kumimoji="0" lang="fr-FR" altLang="fr-FR" sz="1800" b="0" i="0" u="none" strike="noStrike" cap="none" normalizeH="0" baseline="0" dirty="0">
+                <a:ln>
+                  <a:noFill/>
+                </a:ln>
+                <a:solidFill>
+                  <a:schemeClr val="tx1"/>
+                </a:solidFill>
+                <a:effectLst/>
+                <a:latin typeface="Arial" panose="020B0604020202020204" pitchFamily="34" charset="0"/>
+              </a:rPr>
+              <a:t> The </a:t>
+            </a:r>
+            <a:r>
+              <a:rPr kumimoji="0" lang="fr-FR" altLang="fr-FR" sz="1800" b="1" i="0" u="none" strike="noStrike" cap="none" normalizeH="0" baseline="0" dirty="0">
+                <a:ln>
+                  <a:noFill/>
+                </a:ln>
+                <a:solidFill>
+                  <a:schemeClr val="tx1"/>
+                </a:solidFill>
+                <a:effectLst/>
+                <a:latin typeface="Arial" panose="020B0604020202020204" pitchFamily="34" charset="0"/>
+              </a:rPr>
+              <a:t>Internet</a:t>
+            </a:r>
+            <a:r>
+              <a:rPr kumimoji="0" lang="fr-FR" altLang="fr-FR" sz="1800" b="0" i="0" u="none" strike="noStrike" cap="none" normalizeH="0" baseline="0" dirty="0">
+                <a:ln>
+                  <a:noFill/>
+                </a:ln>
+                <a:solidFill>
+                  <a:schemeClr val="tx1"/>
+                </a:solidFill>
+                <a:effectLst/>
+                <a:latin typeface="Arial" panose="020B0604020202020204" pitchFamily="34" charset="0"/>
+              </a:rPr>
+              <a:t> layer (The "</a:t>
+            </a:r>
+            <a:r>
+              <a:rPr kumimoji="0" lang="fr-FR" altLang="fr-FR" sz="1800" b="0" i="0" u="none" strike="noStrike" cap="none" normalizeH="0" baseline="0" dirty="0" err="1">
+                <a:ln>
+                  <a:noFill/>
+                </a:ln>
+                <a:solidFill>
+                  <a:schemeClr val="tx1"/>
+                </a:solidFill>
+                <a:effectLst/>
+                <a:latin typeface="Arial" panose="020B0604020202020204" pitchFamily="34" charset="0"/>
+              </a:rPr>
+              <a:t>address</a:t>
+            </a:r>
+            <a:r>
+              <a:rPr kumimoji="0" lang="fr-FR" altLang="fr-FR" sz="1800" b="0" i="0" u="none" strike="noStrike" cap="none" normalizeH="0" baseline="0" dirty="0">
+                <a:ln>
+                  <a:noFill/>
+                </a:ln>
+                <a:solidFill>
+                  <a:schemeClr val="tx1"/>
+                </a:solidFill>
+                <a:effectLst/>
+                <a:latin typeface="Arial" panose="020B0604020202020204" pitchFamily="34" charset="0"/>
+              </a:rPr>
+              <a:t>" — </a:t>
+            </a:r>
+            <a:r>
+              <a:rPr kumimoji="0" lang="fr-FR" altLang="fr-FR" sz="1800" b="0" i="0" u="none" strike="noStrike" cap="none" normalizeH="0" baseline="0" dirty="0" err="1">
+                <a:ln>
+                  <a:noFill/>
+                </a:ln>
+                <a:solidFill>
+                  <a:schemeClr val="tx1"/>
+                </a:solidFill>
+                <a:effectLst/>
+                <a:latin typeface="Arial" panose="020B0604020202020204" pitchFamily="34" charset="0"/>
+              </a:rPr>
+              <a:t>getting</a:t>
+            </a:r>
+            <a:r>
+              <a:rPr kumimoji="0" lang="fr-FR" altLang="fr-FR" sz="1800" b="0" i="0" u="none" strike="noStrike" cap="none" normalizeH="0" baseline="0" dirty="0">
+                <a:ln>
+                  <a:noFill/>
+                </a:ln>
+                <a:solidFill>
+                  <a:schemeClr val="tx1"/>
+                </a:solidFill>
+                <a:effectLst/>
+                <a:latin typeface="Arial" panose="020B0604020202020204" pitchFamily="34" charset="0"/>
+              </a:rPr>
+              <a:t> the data to the right server).</a:t>
+            </a:r>
+          </a:p>
+        </p:txBody>
+      </p:sp>
+    </p:spTree>
+    <p:extLst>
+      <p:ext uri="{BB962C8B-B14F-4D97-AF65-F5344CB8AC3E}">
+        <p14:creationId xmlns:p14="http://schemas.microsoft.com/office/powerpoint/2010/main" val="2788996113"/>
+      </p:ext>
+    </p:extLst>
+  </p:cSld>
+  <p:clrMapOvr>
+    <a:masterClrMapping/>
+  </p:clrMapOvr>
+</p:sld>
+</file>
+
+<file path=ppt/slides/slide11.xml><?xml version="1.0" encoding="utf-8"?>
+<p:sld xmlns:a="http://schemas.openxmlformats.org/drawingml/2006/main" xmlns:r="http://schemas.openxmlformats.org/officeDocument/2006/relationships" xmlns:p="http://schemas.openxmlformats.org/presentationml/2006/main">
+  <p:cSld>
+    <p:spTree>
+      <p:nvGrpSpPr>
+        <p:cNvPr id="1" name=""/>
+        <p:cNvGrpSpPr/>
+        <p:nvPr/>
+      </p:nvGrpSpPr>
+      <p:grpSpPr>
+        <a:xfrm>
+          <a:off x="0" y="0"/>
+          <a:ext cx="0" cy="0"/>
+          <a:chOff x="0" y="0"/>
+          <a:chExt cx="0" cy="0"/>
+        </a:xfrm>
+      </p:grpSpPr>
+      <p:sp>
+        <p:nvSpPr>
+          <p:cNvPr id="2" name="Titre 1">
+            <a:extLst>
+              <a:ext uri="{FF2B5EF4-FFF2-40B4-BE49-F238E27FC236}">
+                <a16:creationId xmlns:a16="http://schemas.microsoft.com/office/drawing/2014/main" id="{0433F1E0-66DF-BBAD-61A0-34318BC290F6}"/>
+              </a:ext>
+            </a:extLst>
+          </p:cNvPr>
+          <p:cNvSpPr>
+            <a:spLocks noGrp="1"/>
+          </p:cNvSpPr>
+          <p:nvPr>
+            <p:ph type="title"/>
+          </p:nvPr>
+        </p:nvSpPr>
+        <p:spPr/>
+        <p:txBody>
+          <a:bodyPr/>
+          <a:lstStyle/>
+          <a:p>
+            <a:r>
+              <a:rPr lang="fr-CH" dirty="0"/>
+              <a:t>Internet </a:t>
+            </a:r>
+            <a:r>
+              <a:rPr lang="fr-CH" dirty="0" err="1"/>
+              <a:t>Protocols</a:t>
+            </a:r>
+            <a:r>
+              <a:rPr lang="fr-CH" dirty="0"/>
+              <a:t> </a:t>
+            </a:r>
+          </a:p>
+        </p:txBody>
+      </p:sp>
+      <p:graphicFrame>
+        <p:nvGraphicFramePr>
+          <p:cNvPr id="4" name="Tableau 3">
+            <a:extLst>
+              <a:ext uri="{FF2B5EF4-FFF2-40B4-BE49-F238E27FC236}">
+                <a16:creationId xmlns:a16="http://schemas.microsoft.com/office/drawing/2014/main" id="{58DBB04D-9A65-EC8C-99E7-EB477329B93F}"/>
+              </a:ext>
+            </a:extLst>
+          </p:cNvPr>
+          <p:cNvGraphicFramePr>
+            <a:graphicFrameLocks noGrp="1"/>
+          </p:cNvGraphicFramePr>
+          <p:nvPr>
+            <p:extLst>
+              <p:ext uri="{D42A27DB-BD31-4B8C-83A1-F6EECF244321}">
+                <p14:modId xmlns:p14="http://schemas.microsoft.com/office/powerpoint/2010/main" val="2146695455"/>
+              </p:ext>
+            </p:extLst>
+          </p:nvPr>
+        </p:nvGraphicFramePr>
+        <p:xfrm>
+          <a:off x="838200" y="1732374"/>
+          <a:ext cx="10515600" cy="4356303"/>
+        </p:xfrm>
+        <a:graphic>
+          <a:graphicData uri="http://schemas.openxmlformats.org/drawingml/2006/table">
+            <a:tbl>
+              <a:tblPr/>
+              <a:tblGrid>
+                <a:gridCol w="2628900">
+                  <a:extLst>
+                    <a:ext uri="{9D8B030D-6E8A-4147-A177-3AD203B41FA5}">
+                      <a16:colId xmlns:a16="http://schemas.microsoft.com/office/drawing/2014/main" val="1783736409"/>
+                    </a:ext>
+                  </a:extLst>
+                </a:gridCol>
+                <a:gridCol w="2628900">
+                  <a:extLst>
+                    <a:ext uri="{9D8B030D-6E8A-4147-A177-3AD203B41FA5}">
+                      <a16:colId xmlns:a16="http://schemas.microsoft.com/office/drawing/2014/main" val="162252591"/>
+                    </a:ext>
+                  </a:extLst>
+                </a:gridCol>
+                <a:gridCol w="2628900">
+                  <a:extLst>
+                    <a:ext uri="{9D8B030D-6E8A-4147-A177-3AD203B41FA5}">
+                      <a16:colId xmlns:a16="http://schemas.microsoft.com/office/drawing/2014/main" val="2537833065"/>
+                    </a:ext>
+                  </a:extLst>
+                </a:gridCol>
+                <a:gridCol w="2628900">
+                  <a:extLst>
+                    <a:ext uri="{9D8B030D-6E8A-4147-A177-3AD203B41FA5}">
+                      <a16:colId xmlns:a16="http://schemas.microsoft.com/office/drawing/2014/main" val="2747536138"/>
+                    </a:ext>
+                  </a:extLst>
+                </a:gridCol>
+              </a:tblGrid>
+              <a:tr h="314778">
+                <a:tc>
+                  <a:txBody>
+                    <a:bodyPr/>
+                    <a:lstStyle/>
+                    <a:p>
+                      <a:pPr rtl="0">
+                        <a:buNone/>
+                      </a:pPr>
+                      <a:r>
+                        <a:rPr lang="fr-CH" sz="1100" b="1">
+                          <a:solidFill>
+                            <a:srgbClr val="1F1F1F"/>
+                          </a:solidFill>
+                          <a:effectLst/>
+                          <a:latin typeface="Google Sans Text"/>
+                        </a:rPr>
+                        <a:t>Feature</a:t>
+                      </a:r>
+                      <a:endParaRPr lang="fr-CH" sz="1100">
+                        <a:solidFill>
+                          <a:srgbClr val="1F1F1F"/>
+                        </a:solidFill>
+                        <a:effectLst/>
+                        <a:latin typeface="Google Sans Text"/>
+                      </a:endParaRPr>
+                    </a:p>
+                  </a:txBody>
+                  <a:tcPr marL="55549" marR="55549" marT="74065" marB="74065" anchor="ctr">
+                    <a:lnL w="7620" cap="flat" cmpd="sng" algn="ctr">
+                      <a:solidFill>
+                        <a:schemeClr val="bg1"/>
+                      </a:solidFill>
+                      <a:prstDash val="solid"/>
+                      <a:round/>
+                      <a:headEnd type="none" w="med" len="med"/>
+                      <a:tailEnd type="none" w="med" len="med"/>
+                    </a:lnL>
+                    <a:lnR w="7620" cap="flat" cmpd="sng" algn="ctr">
+                      <a:solidFill>
+                        <a:schemeClr val="bg1"/>
+                      </a:solidFill>
+                      <a:prstDash val="solid"/>
+                      <a:round/>
+                      <a:headEnd type="none" w="med" len="med"/>
+                      <a:tailEnd type="none" w="med" len="med"/>
+                    </a:lnR>
+                    <a:lnT w="7620" cap="flat" cmpd="sng" algn="ctr">
+                      <a:solidFill>
+                        <a:schemeClr val="bg1"/>
+                      </a:solidFill>
+                      <a:prstDash val="solid"/>
+                      <a:round/>
+                      <a:headEnd type="none" w="med" len="med"/>
+                      <a:tailEnd type="none" w="med" len="med"/>
+                    </a:lnT>
+                    <a:lnB w="7620" cap="flat" cmpd="sng" algn="ctr">
+                      <a:solidFill>
+                        <a:schemeClr val="bg1"/>
+                      </a:solidFill>
+                      <a:prstDash val="solid"/>
+                      <a:round/>
+                      <a:headEnd type="none" w="med" len="med"/>
+                      <a:tailEnd type="none" w="med" len="med"/>
+                    </a:lnB>
+                    <a:noFill/>
+                  </a:tcPr>
+                </a:tc>
+                <a:tc>
+                  <a:txBody>
+                    <a:bodyPr/>
+                    <a:lstStyle/>
+                    <a:p>
+                      <a:pPr rtl="0">
+                        <a:buNone/>
+                      </a:pPr>
+                      <a:r>
+                        <a:rPr lang="fr-CH" sz="1100" b="1">
+                          <a:solidFill>
+                            <a:srgbClr val="1F1F1F"/>
+                          </a:solidFill>
+                          <a:effectLst/>
+                          <a:latin typeface="Google Sans Text"/>
+                        </a:rPr>
+                        <a:t>HTTP (REST)</a:t>
+                      </a:r>
+                      <a:endParaRPr lang="fr-CH" sz="1100">
+                        <a:solidFill>
+                          <a:srgbClr val="1F1F1F"/>
+                        </a:solidFill>
+                        <a:effectLst/>
+                        <a:latin typeface="Google Sans Text"/>
+                      </a:endParaRPr>
+                    </a:p>
+                  </a:txBody>
+                  <a:tcPr marL="55549" marR="55549" marT="74065" marB="74065" anchor="ctr">
+                    <a:lnL w="7620" cap="flat" cmpd="sng" algn="ctr">
+                      <a:solidFill>
+                        <a:schemeClr val="bg1"/>
+                      </a:solidFill>
+                      <a:prstDash val="solid"/>
+                      <a:round/>
+                      <a:headEnd type="none" w="med" len="med"/>
+                      <a:tailEnd type="none" w="med" len="med"/>
+                    </a:lnL>
+                    <a:lnR w="7620" cap="flat" cmpd="sng" algn="ctr">
+                      <a:solidFill>
+                        <a:schemeClr val="bg1"/>
+                      </a:solidFill>
+                      <a:prstDash val="solid"/>
+                      <a:round/>
+                      <a:headEnd type="none" w="med" len="med"/>
+                      <a:tailEnd type="none" w="med" len="med"/>
+                    </a:lnR>
+                    <a:lnT w="7620" cap="flat" cmpd="sng" algn="ctr">
+                      <a:solidFill>
+                        <a:schemeClr val="bg1"/>
+                      </a:solidFill>
+                      <a:prstDash val="solid"/>
+                      <a:round/>
+                      <a:headEnd type="none" w="med" len="med"/>
+                      <a:tailEnd type="none" w="med" len="med"/>
+                    </a:lnT>
+                    <a:lnB w="7620" cap="flat" cmpd="sng" algn="ctr">
+                      <a:solidFill>
+                        <a:schemeClr val="bg1"/>
+                      </a:solidFill>
+                      <a:prstDash val="solid"/>
+                      <a:round/>
+                      <a:headEnd type="none" w="med" len="med"/>
+                      <a:tailEnd type="none" w="med" len="med"/>
+                    </a:lnB>
+                    <a:noFill/>
+                  </a:tcPr>
+                </a:tc>
+                <a:tc>
+                  <a:txBody>
+                    <a:bodyPr/>
+                    <a:lstStyle/>
+                    <a:p>
+                      <a:pPr rtl="0">
+                        <a:buNone/>
+                      </a:pPr>
+                      <a:r>
+                        <a:rPr lang="fr-CH" sz="1100" b="1">
+                          <a:solidFill>
+                            <a:srgbClr val="1F1F1F"/>
+                          </a:solidFill>
+                          <a:effectLst/>
+                          <a:latin typeface="Google Sans Text"/>
+                        </a:rPr>
+                        <a:t>WebSockets</a:t>
+                      </a:r>
+                      <a:endParaRPr lang="fr-CH" sz="1100">
+                        <a:solidFill>
+                          <a:srgbClr val="1F1F1F"/>
+                        </a:solidFill>
+                        <a:effectLst/>
+                        <a:latin typeface="Google Sans Text"/>
+                      </a:endParaRPr>
+                    </a:p>
+                  </a:txBody>
+                  <a:tcPr marL="55549" marR="55549" marT="74065" marB="74065" anchor="ctr">
+                    <a:lnL w="7620" cap="flat" cmpd="sng" algn="ctr">
+                      <a:solidFill>
+                        <a:schemeClr val="bg1"/>
+                      </a:solidFill>
+                      <a:prstDash val="solid"/>
+                      <a:round/>
+                      <a:headEnd type="none" w="med" len="med"/>
+                      <a:tailEnd type="none" w="med" len="med"/>
+                    </a:lnL>
+                    <a:lnR w="7620" cap="flat" cmpd="sng" algn="ctr">
+                      <a:solidFill>
+                        <a:schemeClr val="bg1"/>
+                      </a:solidFill>
+                      <a:prstDash val="solid"/>
+                      <a:round/>
+                      <a:headEnd type="none" w="med" len="med"/>
+                      <a:tailEnd type="none" w="med" len="med"/>
+                    </a:lnR>
+                    <a:lnT w="7620" cap="flat" cmpd="sng" algn="ctr">
+                      <a:solidFill>
+                        <a:schemeClr val="bg1"/>
+                      </a:solidFill>
+                      <a:prstDash val="solid"/>
+                      <a:round/>
+                      <a:headEnd type="none" w="med" len="med"/>
+                      <a:tailEnd type="none" w="med" len="med"/>
+                    </a:lnT>
+                    <a:lnB w="7620" cap="flat" cmpd="sng" algn="ctr">
+                      <a:solidFill>
+                        <a:schemeClr val="bg1"/>
+                      </a:solidFill>
+                      <a:prstDash val="solid"/>
+                      <a:round/>
+                      <a:headEnd type="none" w="med" len="med"/>
+                      <a:tailEnd type="none" w="med" len="med"/>
+                    </a:lnB>
+                    <a:noFill/>
+                  </a:tcPr>
+                </a:tc>
+                <a:tc>
+                  <a:txBody>
+                    <a:bodyPr/>
+                    <a:lstStyle/>
+                    <a:p>
+                      <a:pPr rtl="0">
+                        <a:buNone/>
+                      </a:pPr>
+                      <a:r>
+                        <a:rPr lang="fr-CH" sz="1100" b="1">
+                          <a:solidFill>
+                            <a:srgbClr val="1F1F1F"/>
+                          </a:solidFill>
+                          <a:effectLst/>
+                          <a:latin typeface="Google Sans Text"/>
+                        </a:rPr>
+                        <a:t>MQTT</a:t>
+                      </a:r>
+                      <a:endParaRPr lang="fr-CH" sz="1100">
+                        <a:solidFill>
+                          <a:srgbClr val="1F1F1F"/>
+                        </a:solidFill>
+                        <a:effectLst/>
+                        <a:latin typeface="Google Sans Text"/>
+                      </a:endParaRPr>
+                    </a:p>
+                  </a:txBody>
+                  <a:tcPr marL="55549" marR="55549" marT="74065" marB="74065" anchor="ctr">
+                    <a:lnL w="7620" cap="flat" cmpd="sng" algn="ctr">
+                      <a:solidFill>
+                        <a:schemeClr val="bg1"/>
+                      </a:solidFill>
+                      <a:prstDash val="solid"/>
+                      <a:round/>
+                      <a:headEnd type="none" w="med" len="med"/>
+                      <a:tailEnd type="none" w="med" len="med"/>
+                    </a:lnL>
+                    <a:lnR w="7620" cap="flat" cmpd="sng" algn="ctr">
+                      <a:solidFill>
+                        <a:schemeClr val="bg1"/>
+                      </a:solidFill>
+                      <a:prstDash val="solid"/>
+                      <a:round/>
+                      <a:headEnd type="none" w="med" len="med"/>
+                      <a:tailEnd type="none" w="med" len="med"/>
+                    </a:lnR>
+                    <a:lnT w="7620" cap="flat" cmpd="sng" algn="ctr">
+                      <a:solidFill>
+                        <a:schemeClr val="bg1"/>
+                      </a:solidFill>
+                      <a:prstDash val="solid"/>
+                      <a:round/>
+                      <a:headEnd type="none" w="med" len="med"/>
+                      <a:tailEnd type="none" w="med" len="med"/>
+                    </a:lnT>
+                    <a:lnB w="7620" cap="flat" cmpd="sng" algn="ctr">
+                      <a:solidFill>
+                        <a:schemeClr val="bg1"/>
+                      </a:solidFill>
+                      <a:prstDash val="solid"/>
+                      <a:round/>
+                      <a:headEnd type="none" w="med" len="med"/>
+                      <a:tailEnd type="none" w="med" len="med"/>
+                    </a:lnB>
+                    <a:noFill/>
+                  </a:tcPr>
+                </a:tc>
+                <a:extLst>
+                  <a:ext uri="{0D108BD9-81ED-4DB2-BD59-A6C34878D82A}">
+                    <a16:rowId xmlns:a16="http://schemas.microsoft.com/office/drawing/2014/main" val="261901981"/>
+                  </a:ext>
+                </a:extLst>
+              </a:tr>
+              <a:tr h="481425">
+                <a:tc>
+                  <a:txBody>
+                    <a:bodyPr/>
+                    <a:lstStyle/>
+                    <a:p>
+                      <a:pPr rtl="0">
+                        <a:buNone/>
+                      </a:pPr>
+                      <a:r>
+                        <a:rPr lang="fr-CH" sz="1100" b="1">
+                          <a:solidFill>
+                            <a:srgbClr val="1F1F1F"/>
+                          </a:solidFill>
+                          <a:effectLst/>
+                          <a:latin typeface="Google Sans Text"/>
+                        </a:rPr>
+                        <a:t>Model</a:t>
+                      </a:r>
+                      <a:endParaRPr lang="fr-CH" sz="1100">
+                        <a:solidFill>
+                          <a:srgbClr val="1F1F1F"/>
+                        </a:solidFill>
+                        <a:effectLst/>
+                        <a:latin typeface="Google Sans Text"/>
+                      </a:endParaRPr>
+                    </a:p>
+                  </a:txBody>
+                  <a:tcPr marL="55549" marR="55549" marT="74065" marB="74065" anchor="ctr">
+                    <a:lnL w="7620" cap="flat" cmpd="sng" algn="ctr">
+                      <a:solidFill>
+                        <a:schemeClr val="bg1"/>
+                      </a:solidFill>
+                      <a:prstDash val="solid"/>
+                      <a:round/>
+                      <a:headEnd type="none" w="med" len="med"/>
+                      <a:tailEnd type="none" w="med" len="med"/>
+                    </a:lnL>
+                    <a:lnR w="7620" cap="flat" cmpd="sng" algn="ctr">
+                      <a:solidFill>
+                        <a:schemeClr val="bg1"/>
+                      </a:solidFill>
+                      <a:prstDash val="solid"/>
+                      <a:round/>
+                      <a:headEnd type="none" w="med" len="med"/>
+                      <a:tailEnd type="none" w="med" len="med"/>
+                    </a:lnR>
+                    <a:lnT w="7620" cap="flat" cmpd="sng" algn="ctr">
+                      <a:solidFill>
+                        <a:schemeClr val="bg1"/>
+                      </a:solidFill>
+                      <a:prstDash val="solid"/>
+                      <a:round/>
+                      <a:headEnd type="none" w="med" len="med"/>
+                      <a:tailEnd type="none" w="med" len="med"/>
+                    </a:lnT>
+                    <a:lnB w="7620" cap="flat" cmpd="sng" algn="ctr">
+                      <a:solidFill>
+                        <a:schemeClr val="bg1"/>
+                      </a:solidFill>
+                      <a:prstDash val="solid"/>
+                      <a:round/>
+                      <a:headEnd type="none" w="med" len="med"/>
+                      <a:tailEnd type="none" w="med" len="med"/>
+                    </a:lnB>
+                    <a:noFill/>
+                  </a:tcPr>
+                </a:tc>
+                <a:tc>
+                  <a:txBody>
+                    <a:bodyPr/>
+                    <a:lstStyle/>
+                    <a:p>
+                      <a:pPr rtl="0">
+                        <a:buNone/>
+                      </a:pPr>
+                      <a:r>
+                        <a:rPr lang="fr-CH" sz="1100" b="1">
+                          <a:solidFill>
+                            <a:srgbClr val="1F1F1F"/>
+                          </a:solidFill>
+                          <a:effectLst/>
+                          <a:latin typeface="Google Sans Text"/>
+                        </a:rPr>
+                        <a:t>Request/Response</a:t>
+                      </a:r>
+                      <a:r>
+                        <a:rPr lang="fr-CH" sz="1100">
+                          <a:solidFill>
+                            <a:srgbClr val="1F1F1F"/>
+                          </a:solidFill>
+                          <a:effectLst/>
+                          <a:latin typeface="Google Sans Text"/>
+                        </a:rPr>
+                        <a:t> (Client asks, Server answers)</a:t>
+                      </a:r>
+                    </a:p>
+                  </a:txBody>
+                  <a:tcPr marL="55549" marR="55549" marT="74065" marB="74065" anchor="ctr">
+                    <a:lnL w="7620" cap="flat" cmpd="sng" algn="ctr">
+                      <a:solidFill>
+                        <a:schemeClr val="bg1"/>
+                      </a:solidFill>
+                      <a:prstDash val="solid"/>
+                      <a:round/>
+                      <a:headEnd type="none" w="med" len="med"/>
+                      <a:tailEnd type="none" w="med" len="med"/>
+                    </a:lnL>
+                    <a:lnR w="7620" cap="flat" cmpd="sng" algn="ctr">
+                      <a:solidFill>
+                        <a:schemeClr val="bg1"/>
+                      </a:solidFill>
+                      <a:prstDash val="solid"/>
+                      <a:round/>
+                      <a:headEnd type="none" w="med" len="med"/>
+                      <a:tailEnd type="none" w="med" len="med"/>
+                    </a:lnR>
+                    <a:lnT w="7620" cap="flat" cmpd="sng" algn="ctr">
+                      <a:solidFill>
+                        <a:schemeClr val="bg1"/>
+                      </a:solidFill>
+                      <a:prstDash val="solid"/>
+                      <a:round/>
+                      <a:headEnd type="none" w="med" len="med"/>
+                      <a:tailEnd type="none" w="med" len="med"/>
+                    </a:lnT>
+                    <a:lnB w="7620" cap="flat" cmpd="sng" algn="ctr">
+                      <a:solidFill>
+                        <a:schemeClr val="bg1"/>
+                      </a:solidFill>
+                      <a:prstDash val="solid"/>
+                      <a:round/>
+                      <a:headEnd type="none" w="med" len="med"/>
+                      <a:tailEnd type="none" w="med" len="med"/>
+                    </a:lnB>
+                    <a:noFill/>
+                  </a:tcPr>
+                </a:tc>
+                <a:tc>
+                  <a:txBody>
+                    <a:bodyPr/>
+                    <a:lstStyle/>
+                    <a:p>
+                      <a:pPr rtl="0">
+                        <a:buNone/>
+                      </a:pPr>
+                      <a:r>
+                        <a:rPr lang="fr-CH" sz="1100" b="1">
+                          <a:solidFill>
+                            <a:srgbClr val="1F1F1F"/>
+                          </a:solidFill>
+                          <a:effectLst/>
+                          <a:latin typeface="Google Sans Text"/>
+                        </a:rPr>
+                        <a:t>Full-Duplex</a:t>
+                      </a:r>
+                      <a:r>
+                        <a:rPr lang="fr-CH" sz="1100">
+                          <a:solidFill>
+                            <a:srgbClr val="1F1F1F"/>
+                          </a:solidFill>
+                          <a:effectLst/>
+                          <a:latin typeface="Google Sans Text"/>
+                        </a:rPr>
+                        <a:t> (Continuous bi-directional stream)</a:t>
+                      </a:r>
+                    </a:p>
+                  </a:txBody>
+                  <a:tcPr marL="55549" marR="55549" marT="74065" marB="74065" anchor="ctr">
+                    <a:lnL w="7620" cap="flat" cmpd="sng" algn="ctr">
+                      <a:solidFill>
+                        <a:schemeClr val="bg1"/>
+                      </a:solidFill>
+                      <a:prstDash val="solid"/>
+                      <a:round/>
+                      <a:headEnd type="none" w="med" len="med"/>
+                      <a:tailEnd type="none" w="med" len="med"/>
+                    </a:lnL>
+                    <a:lnR w="7620" cap="flat" cmpd="sng" algn="ctr">
+                      <a:solidFill>
+                        <a:schemeClr val="bg1"/>
+                      </a:solidFill>
+                      <a:prstDash val="solid"/>
+                      <a:round/>
+                      <a:headEnd type="none" w="med" len="med"/>
+                      <a:tailEnd type="none" w="med" len="med"/>
+                    </a:lnR>
+                    <a:lnT w="7620" cap="flat" cmpd="sng" algn="ctr">
+                      <a:solidFill>
+                        <a:schemeClr val="bg1"/>
+                      </a:solidFill>
+                      <a:prstDash val="solid"/>
+                      <a:round/>
+                      <a:headEnd type="none" w="med" len="med"/>
+                      <a:tailEnd type="none" w="med" len="med"/>
+                    </a:lnT>
+                    <a:lnB w="7620" cap="flat" cmpd="sng" algn="ctr">
+                      <a:solidFill>
+                        <a:schemeClr val="bg1"/>
+                      </a:solidFill>
+                      <a:prstDash val="solid"/>
+                      <a:round/>
+                      <a:headEnd type="none" w="med" len="med"/>
+                      <a:tailEnd type="none" w="med" len="med"/>
+                    </a:lnB>
+                    <a:noFill/>
+                  </a:tcPr>
+                </a:tc>
+                <a:tc>
+                  <a:txBody>
+                    <a:bodyPr/>
+                    <a:lstStyle/>
+                    <a:p>
+                      <a:pPr rtl="0">
+                        <a:buNone/>
+                      </a:pPr>
+                      <a:r>
+                        <a:rPr lang="fr-CH" sz="1100" b="1">
+                          <a:solidFill>
+                            <a:srgbClr val="1F1F1F"/>
+                          </a:solidFill>
+                          <a:effectLst/>
+                          <a:latin typeface="Google Sans Text"/>
+                        </a:rPr>
+                        <a:t>Pub/Sub</a:t>
+                      </a:r>
+                      <a:r>
+                        <a:rPr lang="fr-CH" sz="1100">
+                          <a:solidFill>
+                            <a:srgbClr val="1F1F1F"/>
+                          </a:solidFill>
+                          <a:effectLst/>
+                          <a:latin typeface="Google Sans Text"/>
+                        </a:rPr>
+                        <a:t> (Broker-mediated messaging)</a:t>
+                      </a:r>
+                    </a:p>
+                  </a:txBody>
+                  <a:tcPr marL="55549" marR="55549" marT="74065" marB="74065" anchor="ctr">
+                    <a:lnL w="7620" cap="flat" cmpd="sng" algn="ctr">
+                      <a:solidFill>
+                        <a:schemeClr val="bg1"/>
+                      </a:solidFill>
+                      <a:prstDash val="solid"/>
+                      <a:round/>
+                      <a:headEnd type="none" w="med" len="med"/>
+                      <a:tailEnd type="none" w="med" len="med"/>
+                    </a:lnL>
+                    <a:lnR w="7620" cap="flat" cmpd="sng" algn="ctr">
+                      <a:solidFill>
+                        <a:schemeClr val="bg1"/>
+                      </a:solidFill>
+                      <a:prstDash val="solid"/>
+                      <a:round/>
+                      <a:headEnd type="none" w="med" len="med"/>
+                      <a:tailEnd type="none" w="med" len="med"/>
+                    </a:lnR>
+                    <a:lnT w="7620" cap="flat" cmpd="sng" algn="ctr">
+                      <a:solidFill>
+                        <a:schemeClr val="bg1"/>
+                      </a:solidFill>
+                      <a:prstDash val="solid"/>
+                      <a:round/>
+                      <a:headEnd type="none" w="med" len="med"/>
+                      <a:tailEnd type="none" w="med" len="med"/>
+                    </a:lnT>
+                    <a:lnB w="7620" cap="flat" cmpd="sng" algn="ctr">
+                      <a:solidFill>
+                        <a:schemeClr val="bg1"/>
+                      </a:solidFill>
+                      <a:prstDash val="solid"/>
+                      <a:round/>
+                      <a:headEnd type="none" w="med" len="med"/>
+                      <a:tailEnd type="none" w="med" len="med"/>
+                    </a:lnB>
+                    <a:noFill/>
+                  </a:tcPr>
+                </a:tc>
+                <a:extLst>
+                  <a:ext uri="{0D108BD9-81ED-4DB2-BD59-A6C34878D82A}">
+                    <a16:rowId xmlns:a16="http://schemas.microsoft.com/office/drawing/2014/main" val="4130905167"/>
+                  </a:ext>
+                </a:extLst>
+              </a:tr>
+              <a:tr h="481425">
+                <a:tc>
+                  <a:txBody>
+                    <a:bodyPr/>
+                    <a:lstStyle/>
+                    <a:p>
+                      <a:pPr rtl="0">
+                        <a:buNone/>
+                      </a:pPr>
+                      <a:r>
+                        <a:rPr lang="fr-CH" sz="1100" b="1">
+                          <a:solidFill>
+                            <a:srgbClr val="1F1F1F"/>
+                          </a:solidFill>
+                          <a:effectLst/>
+                          <a:latin typeface="Google Sans Text"/>
+                        </a:rPr>
+                        <a:t>Connection</a:t>
+                      </a:r>
+                      <a:endParaRPr lang="fr-CH" sz="1100">
+                        <a:solidFill>
+                          <a:srgbClr val="1F1F1F"/>
+                        </a:solidFill>
+                        <a:effectLst/>
+                        <a:latin typeface="Google Sans Text"/>
+                      </a:endParaRPr>
+                    </a:p>
+                  </a:txBody>
+                  <a:tcPr marL="55549" marR="55549" marT="74065" marB="74065" anchor="ctr">
+                    <a:lnL w="7620" cap="flat" cmpd="sng" algn="ctr">
+                      <a:solidFill>
+                        <a:schemeClr val="bg1"/>
+                      </a:solidFill>
+                      <a:prstDash val="solid"/>
+                      <a:round/>
+                      <a:headEnd type="none" w="med" len="med"/>
+                      <a:tailEnd type="none" w="med" len="med"/>
+                    </a:lnL>
+                    <a:lnR w="7620" cap="flat" cmpd="sng" algn="ctr">
+                      <a:solidFill>
+                        <a:schemeClr val="bg1"/>
+                      </a:solidFill>
+                      <a:prstDash val="solid"/>
+                      <a:round/>
+                      <a:headEnd type="none" w="med" len="med"/>
+                      <a:tailEnd type="none" w="med" len="med"/>
+                    </a:lnR>
+                    <a:lnT w="7620" cap="flat" cmpd="sng" algn="ctr">
+                      <a:solidFill>
+                        <a:schemeClr val="bg1"/>
+                      </a:solidFill>
+                      <a:prstDash val="solid"/>
+                      <a:round/>
+                      <a:headEnd type="none" w="med" len="med"/>
+                      <a:tailEnd type="none" w="med" len="med"/>
+                    </a:lnT>
+                    <a:lnB w="7620" cap="flat" cmpd="sng" algn="ctr">
+                      <a:solidFill>
+                        <a:schemeClr val="bg1"/>
+                      </a:solidFill>
+                      <a:prstDash val="solid"/>
+                      <a:round/>
+                      <a:headEnd type="none" w="med" len="med"/>
+                      <a:tailEnd type="none" w="med" len="med"/>
+                    </a:lnB>
+                    <a:noFill/>
+                  </a:tcPr>
+                </a:tc>
+                <a:tc>
+                  <a:txBody>
+                    <a:bodyPr/>
+                    <a:lstStyle/>
+                    <a:p>
+                      <a:pPr rtl="0">
+                        <a:buNone/>
+                      </a:pPr>
+                      <a:r>
+                        <a:rPr lang="en-US" sz="1100" b="1">
+                          <a:solidFill>
+                            <a:srgbClr val="1F1F1F"/>
+                          </a:solidFill>
+                          <a:effectLst/>
+                          <a:latin typeface="Google Sans Text"/>
+                        </a:rPr>
+                        <a:t>Ephemeral:</a:t>
+                      </a:r>
+                      <a:r>
+                        <a:rPr lang="en-US" sz="1100">
+                          <a:solidFill>
+                            <a:srgbClr val="1F1F1F"/>
+                          </a:solidFill>
+                          <a:effectLst/>
+                          <a:latin typeface="Google Sans Text"/>
+                        </a:rPr>
+                        <a:t> Opens, sends data, closes.</a:t>
+                      </a:r>
+                    </a:p>
+                  </a:txBody>
+                  <a:tcPr marL="55549" marR="55549" marT="74065" marB="74065" anchor="ctr">
+                    <a:lnL w="7620" cap="flat" cmpd="sng" algn="ctr">
+                      <a:solidFill>
+                        <a:schemeClr val="bg1"/>
+                      </a:solidFill>
+                      <a:prstDash val="solid"/>
+                      <a:round/>
+                      <a:headEnd type="none" w="med" len="med"/>
+                      <a:tailEnd type="none" w="med" len="med"/>
+                    </a:lnL>
+                    <a:lnR w="7620" cap="flat" cmpd="sng" algn="ctr">
+                      <a:solidFill>
+                        <a:schemeClr val="bg1"/>
+                      </a:solidFill>
+                      <a:prstDash val="solid"/>
+                      <a:round/>
+                      <a:headEnd type="none" w="med" len="med"/>
+                      <a:tailEnd type="none" w="med" len="med"/>
+                    </a:lnR>
+                    <a:lnT w="7620" cap="flat" cmpd="sng" algn="ctr">
+                      <a:solidFill>
+                        <a:schemeClr val="bg1"/>
+                      </a:solidFill>
+                      <a:prstDash val="solid"/>
+                      <a:round/>
+                      <a:headEnd type="none" w="med" len="med"/>
+                      <a:tailEnd type="none" w="med" len="med"/>
+                    </a:lnT>
+                    <a:lnB w="7620" cap="flat" cmpd="sng" algn="ctr">
+                      <a:solidFill>
+                        <a:schemeClr val="bg1"/>
+                      </a:solidFill>
+                      <a:prstDash val="solid"/>
+                      <a:round/>
+                      <a:headEnd type="none" w="med" len="med"/>
+                      <a:tailEnd type="none" w="med" len="med"/>
+                    </a:lnB>
+                    <a:noFill/>
+                  </a:tcPr>
+                </a:tc>
+                <a:tc>
+                  <a:txBody>
+                    <a:bodyPr/>
+                    <a:lstStyle/>
+                    <a:p>
+                      <a:pPr rtl="0">
+                        <a:buNone/>
+                      </a:pPr>
+                      <a:r>
+                        <a:rPr lang="en-US" sz="1100" b="1">
+                          <a:solidFill>
+                            <a:srgbClr val="1F1F1F"/>
+                          </a:solidFill>
+                          <a:effectLst/>
+                          <a:latin typeface="Google Sans Text"/>
+                        </a:rPr>
+                        <a:t>Persistent:</a:t>
+                      </a:r>
+                      <a:r>
+                        <a:rPr lang="en-US" sz="1100">
+                          <a:solidFill>
+                            <a:srgbClr val="1F1F1F"/>
+                          </a:solidFill>
+                          <a:effectLst/>
+                          <a:latin typeface="Google Sans Text"/>
+                        </a:rPr>
+                        <a:t> Keeps a single socket open.</a:t>
+                      </a:r>
+                    </a:p>
+                  </a:txBody>
+                  <a:tcPr marL="55549" marR="55549" marT="74065" marB="74065" anchor="ctr">
+                    <a:lnL w="7620" cap="flat" cmpd="sng" algn="ctr">
+                      <a:solidFill>
+                        <a:schemeClr val="bg1"/>
+                      </a:solidFill>
+                      <a:prstDash val="solid"/>
+                      <a:round/>
+                      <a:headEnd type="none" w="med" len="med"/>
+                      <a:tailEnd type="none" w="med" len="med"/>
+                    </a:lnL>
+                    <a:lnR w="7620" cap="flat" cmpd="sng" algn="ctr">
+                      <a:solidFill>
+                        <a:schemeClr val="bg1"/>
+                      </a:solidFill>
+                      <a:prstDash val="solid"/>
+                      <a:round/>
+                      <a:headEnd type="none" w="med" len="med"/>
+                      <a:tailEnd type="none" w="med" len="med"/>
+                    </a:lnR>
+                    <a:lnT w="7620" cap="flat" cmpd="sng" algn="ctr">
+                      <a:solidFill>
+                        <a:schemeClr val="bg1"/>
+                      </a:solidFill>
+                      <a:prstDash val="solid"/>
+                      <a:round/>
+                      <a:headEnd type="none" w="med" len="med"/>
+                      <a:tailEnd type="none" w="med" len="med"/>
+                    </a:lnT>
+                    <a:lnB w="7620" cap="flat" cmpd="sng" algn="ctr">
+                      <a:solidFill>
+                        <a:schemeClr val="bg1"/>
+                      </a:solidFill>
+                      <a:prstDash val="solid"/>
+                      <a:round/>
+                      <a:headEnd type="none" w="med" len="med"/>
+                      <a:tailEnd type="none" w="med" len="med"/>
+                    </a:lnB>
+                    <a:noFill/>
+                  </a:tcPr>
+                </a:tc>
+                <a:tc>
+                  <a:txBody>
+                    <a:bodyPr/>
+                    <a:lstStyle/>
+                    <a:p>
+                      <a:pPr rtl="0">
+                        <a:buNone/>
+                      </a:pPr>
+                      <a:r>
+                        <a:rPr lang="en-US" sz="1100" b="1">
+                          <a:solidFill>
+                            <a:srgbClr val="1F1F1F"/>
+                          </a:solidFill>
+                          <a:effectLst/>
+                          <a:latin typeface="Google Sans Text"/>
+                        </a:rPr>
+                        <a:t>Persistent:</a:t>
+                      </a:r>
+                      <a:r>
+                        <a:rPr lang="en-US" sz="1100">
+                          <a:solidFill>
+                            <a:srgbClr val="1F1F1F"/>
+                          </a:solidFill>
+                          <a:effectLst/>
+                          <a:latin typeface="Google Sans Text"/>
+                        </a:rPr>
+                        <a:t> Keeps a "Keep-Alive" session.</a:t>
+                      </a:r>
+                    </a:p>
+                  </a:txBody>
+                  <a:tcPr marL="55549" marR="55549" marT="74065" marB="74065" anchor="ctr">
+                    <a:lnL w="7620" cap="flat" cmpd="sng" algn="ctr">
+                      <a:solidFill>
+                        <a:schemeClr val="bg1"/>
+                      </a:solidFill>
+                      <a:prstDash val="solid"/>
+                      <a:round/>
+                      <a:headEnd type="none" w="med" len="med"/>
+                      <a:tailEnd type="none" w="med" len="med"/>
+                    </a:lnL>
+                    <a:lnR w="7620" cap="flat" cmpd="sng" algn="ctr">
+                      <a:solidFill>
+                        <a:schemeClr val="bg1"/>
+                      </a:solidFill>
+                      <a:prstDash val="solid"/>
+                      <a:round/>
+                      <a:headEnd type="none" w="med" len="med"/>
+                      <a:tailEnd type="none" w="med" len="med"/>
+                    </a:lnR>
+                    <a:lnT w="7620" cap="flat" cmpd="sng" algn="ctr">
+                      <a:solidFill>
+                        <a:schemeClr val="bg1"/>
+                      </a:solidFill>
+                      <a:prstDash val="solid"/>
+                      <a:round/>
+                      <a:headEnd type="none" w="med" len="med"/>
+                      <a:tailEnd type="none" w="med" len="med"/>
+                    </a:lnT>
+                    <a:lnB w="7620" cap="flat" cmpd="sng" algn="ctr">
+                      <a:solidFill>
+                        <a:schemeClr val="bg1"/>
+                      </a:solidFill>
+                      <a:prstDash val="solid"/>
+                      <a:round/>
+                      <a:headEnd type="none" w="med" len="med"/>
+                      <a:tailEnd type="none" w="med" len="med"/>
+                    </a:lnB>
+                    <a:noFill/>
+                  </a:tcPr>
+                </a:tc>
+                <a:extLst>
+                  <a:ext uri="{0D108BD9-81ED-4DB2-BD59-A6C34878D82A}">
+                    <a16:rowId xmlns:a16="http://schemas.microsoft.com/office/drawing/2014/main" val="1809937614"/>
+                  </a:ext>
+                </a:extLst>
+              </a:tr>
+              <a:tr h="648072">
+                <a:tc>
+                  <a:txBody>
+                    <a:bodyPr/>
+                    <a:lstStyle/>
+                    <a:p>
+                      <a:pPr rtl="0">
+                        <a:buNone/>
+                      </a:pPr>
+                      <a:r>
+                        <a:rPr lang="fr-CH" sz="1100" b="1">
+                          <a:solidFill>
+                            <a:srgbClr val="1F1F1F"/>
+                          </a:solidFill>
+                          <a:effectLst/>
+                          <a:latin typeface="Google Sans Text"/>
+                        </a:rPr>
+                        <a:t>Header Size</a:t>
+                      </a:r>
+                      <a:endParaRPr lang="fr-CH" sz="1100">
+                        <a:solidFill>
+                          <a:srgbClr val="1F1F1F"/>
+                        </a:solidFill>
+                        <a:effectLst/>
+                        <a:latin typeface="Google Sans Text"/>
+                      </a:endParaRPr>
+                    </a:p>
+                  </a:txBody>
+                  <a:tcPr marL="55549" marR="55549" marT="74065" marB="74065" anchor="ctr">
+                    <a:lnL w="7620" cap="flat" cmpd="sng" algn="ctr">
+                      <a:solidFill>
+                        <a:schemeClr val="bg1"/>
+                      </a:solidFill>
+                      <a:prstDash val="solid"/>
+                      <a:round/>
+                      <a:headEnd type="none" w="med" len="med"/>
+                      <a:tailEnd type="none" w="med" len="med"/>
+                    </a:lnL>
+                    <a:lnR w="7620" cap="flat" cmpd="sng" algn="ctr">
+                      <a:solidFill>
+                        <a:schemeClr val="bg1"/>
+                      </a:solidFill>
+                      <a:prstDash val="solid"/>
+                      <a:round/>
+                      <a:headEnd type="none" w="med" len="med"/>
+                      <a:tailEnd type="none" w="med" len="med"/>
+                    </a:lnR>
+                    <a:lnT w="7620" cap="flat" cmpd="sng" algn="ctr">
+                      <a:solidFill>
+                        <a:schemeClr val="bg1"/>
+                      </a:solidFill>
+                      <a:prstDash val="solid"/>
+                      <a:round/>
+                      <a:headEnd type="none" w="med" len="med"/>
+                      <a:tailEnd type="none" w="med" len="med"/>
+                    </a:lnT>
+                    <a:lnB w="7620" cap="flat" cmpd="sng" algn="ctr">
+                      <a:solidFill>
+                        <a:schemeClr val="bg1"/>
+                      </a:solidFill>
+                      <a:prstDash val="solid"/>
+                      <a:round/>
+                      <a:headEnd type="none" w="med" len="med"/>
+                      <a:tailEnd type="none" w="med" len="med"/>
+                    </a:lnB>
+                    <a:noFill/>
+                  </a:tcPr>
+                </a:tc>
+                <a:tc>
+                  <a:txBody>
+                    <a:bodyPr/>
+                    <a:lstStyle/>
+                    <a:p>
+                      <a:pPr rtl="0">
+                        <a:buNone/>
+                      </a:pPr>
+                      <a:r>
+                        <a:rPr lang="fr-CH" sz="1100" b="1">
+                          <a:solidFill>
+                            <a:srgbClr val="1F1F1F"/>
+                          </a:solidFill>
+                          <a:effectLst/>
+                          <a:latin typeface="Google Sans Text"/>
+                        </a:rPr>
+                        <a:t>Large:</a:t>
+                      </a:r>
+                      <a:r>
+                        <a:rPr lang="fr-CH" sz="1100">
+                          <a:solidFill>
+                            <a:srgbClr val="1F1F1F"/>
+                          </a:solidFill>
+                          <a:effectLst/>
+                          <a:latin typeface="Google Sans Text"/>
+                        </a:rPr>
+                        <a:t> (800+ bytes) Includes cookies, browser info, etc.</a:t>
+                      </a:r>
+                    </a:p>
+                  </a:txBody>
+                  <a:tcPr marL="55549" marR="55549" marT="74065" marB="74065" anchor="ctr">
+                    <a:lnL w="7620" cap="flat" cmpd="sng" algn="ctr">
+                      <a:solidFill>
+                        <a:schemeClr val="bg1"/>
+                      </a:solidFill>
+                      <a:prstDash val="solid"/>
+                      <a:round/>
+                      <a:headEnd type="none" w="med" len="med"/>
+                      <a:tailEnd type="none" w="med" len="med"/>
+                    </a:lnL>
+                    <a:lnR w="7620" cap="flat" cmpd="sng" algn="ctr">
+                      <a:solidFill>
+                        <a:schemeClr val="bg1"/>
+                      </a:solidFill>
+                      <a:prstDash val="solid"/>
+                      <a:round/>
+                      <a:headEnd type="none" w="med" len="med"/>
+                      <a:tailEnd type="none" w="med" len="med"/>
+                    </a:lnR>
+                    <a:lnT w="7620" cap="flat" cmpd="sng" algn="ctr">
+                      <a:solidFill>
+                        <a:schemeClr val="bg1"/>
+                      </a:solidFill>
+                      <a:prstDash val="solid"/>
+                      <a:round/>
+                      <a:headEnd type="none" w="med" len="med"/>
+                      <a:tailEnd type="none" w="med" len="med"/>
+                    </a:lnT>
+                    <a:lnB w="7620" cap="flat" cmpd="sng" algn="ctr">
+                      <a:solidFill>
+                        <a:schemeClr val="bg1"/>
+                      </a:solidFill>
+                      <a:prstDash val="solid"/>
+                      <a:round/>
+                      <a:headEnd type="none" w="med" len="med"/>
+                      <a:tailEnd type="none" w="med" len="med"/>
+                    </a:lnB>
+                    <a:noFill/>
+                  </a:tcPr>
+                </a:tc>
+                <a:tc>
+                  <a:txBody>
+                    <a:bodyPr/>
+                    <a:lstStyle/>
+                    <a:p>
+                      <a:pPr rtl="0">
+                        <a:buNone/>
+                      </a:pPr>
+                      <a:r>
+                        <a:rPr lang="en-US" sz="1100" b="1">
+                          <a:solidFill>
+                            <a:srgbClr val="1F1F1F"/>
+                          </a:solidFill>
+                          <a:effectLst/>
+                          <a:latin typeface="Google Sans Text"/>
+                        </a:rPr>
+                        <a:t>Medium:</a:t>
+                      </a:r>
+                      <a:r>
+                        <a:rPr lang="en-US" sz="1100">
+                          <a:solidFill>
+                            <a:srgbClr val="1F1F1F"/>
+                          </a:solidFill>
+                          <a:effectLst/>
+                          <a:latin typeface="Google Sans Text"/>
+                        </a:rPr>
+                        <a:t> (Small overhead after initial handshake).</a:t>
+                      </a:r>
+                    </a:p>
+                  </a:txBody>
+                  <a:tcPr marL="55549" marR="55549" marT="74065" marB="74065" anchor="ctr">
+                    <a:lnL w="7620" cap="flat" cmpd="sng" algn="ctr">
+                      <a:solidFill>
+                        <a:schemeClr val="bg1"/>
+                      </a:solidFill>
+                      <a:prstDash val="solid"/>
+                      <a:round/>
+                      <a:headEnd type="none" w="med" len="med"/>
+                      <a:tailEnd type="none" w="med" len="med"/>
+                    </a:lnL>
+                    <a:lnR w="7620" cap="flat" cmpd="sng" algn="ctr">
+                      <a:solidFill>
+                        <a:schemeClr val="bg1"/>
+                      </a:solidFill>
+                      <a:prstDash val="solid"/>
+                      <a:round/>
+                      <a:headEnd type="none" w="med" len="med"/>
+                      <a:tailEnd type="none" w="med" len="med"/>
+                    </a:lnR>
+                    <a:lnT w="7620" cap="flat" cmpd="sng" algn="ctr">
+                      <a:solidFill>
+                        <a:schemeClr val="bg1"/>
+                      </a:solidFill>
+                      <a:prstDash val="solid"/>
+                      <a:round/>
+                      <a:headEnd type="none" w="med" len="med"/>
+                      <a:tailEnd type="none" w="med" len="med"/>
+                    </a:lnT>
+                    <a:lnB w="7620" cap="flat" cmpd="sng" algn="ctr">
+                      <a:solidFill>
+                        <a:schemeClr val="bg1"/>
+                      </a:solidFill>
+                      <a:prstDash val="solid"/>
+                      <a:round/>
+                      <a:headEnd type="none" w="med" len="med"/>
+                      <a:tailEnd type="none" w="med" len="med"/>
+                    </a:lnB>
+                    <a:noFill/>
+                  </a:tcPr>
+                </a:tc>
+                <a:tc>
+                  <a:txBody>
+                    <a:bodyPr/>
+                    <a:lstStyle/>
+                    <a:p>
+                      <a:pPr rtl="0">
+                        <a:buNone/>
+                      </a:pPr>
+                      <a:r>
+                        <a:rPr lang="en-US" sz="1100" b="1" dirty="0">
+                          <a:solidFill>
+                            <a:srgbClr val="1F1F1F"/>
+                          </a:solidFill>
+                          <a:effectLst/>
+                          <a:latin typeface="Google Sans Text"/>
+                        </a:rPr>
+                        <a:t>Tiny:</a:t>
+                      </a:r>
+                      <a:r>
+                        <a:rPr lang="en-US" sz="1100" dirty="0">
+                          <a:solidFill>
+                            <a:srgbClr val="1F1F1F"/>
+                          </a:solidFill>
+                          <a:effectLst/>
+                          <a:latin typeface="Google Sans Text"/>
+                        </a:rPr>
+                        <a:t> (As small as 2 bytes).</a:t>
+                      </a:r>
+                    </a:p>
+                  </a:txBody>
+                  <a:tcPr marL="55549" marR="55549" marT="74065" marB="74065" anchor="ctr">
+                    <a:lnL w="7620" cap="flat" cmpd="sng" algn="ctr">
+                      <a:solidFill>
+                        <a:schemeClr val="bg1"/>
+                      </a:solidFill>
+                      <a:prstDash val="solid"/>
+                      <a:round/>
+                      <a:headEnd type="none" w="med" len="med"/>
+                      <a:tailEnd type="none" w="med" len="med"/>
+                    </a:lnL>
+                    <a:lnR w="7620" cap="flat" cmpd="sng" algn="ctr">
+                      <a:solidFill>
+                        <a:schemeClr val="bg1"/>
+                      </a:solidFill>
+                      <a:prstDash val="solid"/>
+                      <a:round/>
+                      <a:headEnd type="none" w="med" len="med"/>
+                      <a:tailEnd type="none" w="med" len="med"/>
+                    </a:lnR>
+                    <a:lnT w="7620" cap="flat" cmpd="sng" algn="ctr">
+                      <a:solidFill>
+                        <a:schemeClr val="bg1"/>
+                      </a:solidFill>
+                      <a:prstDash val="solid"/>
+                      <a:round/>
+                      <a:headEnd type="none" w="med" len="med"/>
+                      <a:tailEnd type="none" w="med" len="med"/>
+                    </a:lnT>
+                    <a:lnB w="7620" cap="flat" cmpd="sng" algn="ctr">
+                      <a:solidFill>
+                        <a:schemeClr val="bg1"/>
+                      </a:solidFill>
+                      <a:prstDash val="solid"/>
+                      <a:round/>
+                      <a:headEnd type="none" w="med" len="med"/>
+                      <a:tailEnd type="none" w="med" len="med"/>
+                    </a:lnB>
+                    <a:noFill/>
+                  </a:tcPr>
+                </a:tc>
+                <a:extLst>
+                  <a:ext uri="{0D108BD9-81ED-4DB2-BD59-A6C34878D82A}">
+                    <a16:rowId xmlns:a16="http://schemas.microsoft.com/office/drawing/2014/main" val="3252192637"/>
+                  </a:ext>
+                </a:extLst>
+              </a:tr>
+              <a:tr h="481425">
+                <a:tc>
+                  <a:txBody>
+                    <a:bodyPr/>
+                    <a:lstStyle/>
+                    <a:p>
+                      <a:pPr rtl="0">
+                        <a:buNone/>
+                      </a:pPr>
+                      <a:r>
+                        <a:rPr lang="fr-CH" sz="1100" b="1">
+                          <a:solidFill>
+                            <a:srgbClr val="1F1F1F"/>
+                          </a:solidFill>
+                          <a:effectLst/>
+                          <a:latin typeface="Google Sans Text"/>
+                        </a:rPr>
+                        <a:t>Power/Data Consumption</a:t>
+                      </a:r>
+                      <a:endParaRPr lang="fr-CH" sz="1100">
+                        <a:solidFill>
+                          <a:srgbClr val="1F1F1F"/>
+                        </a:solidFill>
+                        <a:effectLst/>
+                        <a:latin typeface="Google Sans Text"/>
+                      </a:endParaRPr>
+                    </a:p>
+                  </a:txBody>
+                  <a:tcPr marL="55549" marR="55549" marT="74065" marB="74065" anchor="ctr">
+                    <a:lnL w="7620" cap="flat" cmpd="sng" algn="ctr">
+                      <a:solidFill>
+                        <a:schemeClr val="bg1"/>
+                      </a:solidFill>
+                      <a:prstDash val="solid"/>
+                      <a:round/>
+                      <a:headEnd type="none" w="med" len="med"/>
+                      <a:tailEnd type="none" w="med" len="med"/>
+                    </a:lnL>
+                    <a:lnR w="7620" cap="flat" cmpd="sng" algn="ctr">
+                      <a:solidFill>
+                        <a:schemeClr val="bg1"/>
+                      </a:solidFill>
+                      <a:prstDash val="solid"/>
+                      <a:round/>
+                      <a:headEnd type="none" w="med" len="med"/>
+                      <a:tailEnd type="none" w="med" len="med"/>
+                    </a:lnR>
+                    <a:lnT w="7620" cap="flat" cmpd="sng" algn="ctr">
+                      <a:solidFill>
+                        <a:schemeClr val="bg1"/>
+                      </a:solidFill>
+                      <a:prstDash val="solid"/>
+                      <a:round/>
+                      <a:headEnd type="none" w="med" len="med"/>
+                      <a:tailEnd type="none" w="med" len="med"/>
+                    </a:lnT>
+                    <a:lnB w="7620" cap="flat" cmpd="sng" algn="ctr">
+                      <a:solidFill>
+                        <a:schemeClr val="bg1"/>
+                      </a:solidFill>
+                      <a:prstDash val="solid"/>
+                      <a:round/>
+                      <a:headEnd type="none" w="med" len="med"/>
+                      <a:tailEnd type="none" w="med" len="med"/>
+                    </a:lnB>
+                    <a:noFill/>
+                  </a:tcPr>
+                </a:tc>
+                <a:tc>
+                  <a:txBody>
+                    <a:bodyPr/>
+                    <a:lstStyle/>
+                    <a:p>
+                      <a:pPr rtl="0">
+                        <a:buNone/>
+                      </a:pPr>
+                      <a:r>
+                        <a:rPr lang="en-US" sz="1100" b="1">
+                          <a:solidFill>
+                            <a:srgbClr val="1F1F1F"/>
+                          </a:solidFill>
+                          <a:effectLst/>
+                          <a:latin typeface="Google Sans Text"/>
+                        </a:rPr>
+                        <a:t>High:</a:t>
+                      </a:r>
+                      <a:r>
+                        <a:rPr lang="en-US" sz="1100">
+                          <a:solidFill>
+                            <a:srgbClr val="1F1F1F"/>
+                          </a:solidFill>
+                          <a:effectLst/>
+                          <a:latin typeface="Google Sans Text"/>
+                        </a:rPr>
+                        <a:t> Heavy for battery-powered devices.</a:t>
+                      </a:r>
+                    </a:p>
+                  </a:txBody>
+                  <a:tcPr marL="55549" marR="55549" marT="74065" marB="74065" anchor="ctr">
+                    <a:lnL w="7620" cap="flat" cmpd="sng" algn="ctr">
+                      <a:solidFill>
+                        <a:schemeClr val="bg1"/>
+                      </a:solidFill>
+                      <a:prstDash val="solid"/>
+                      <a:round/>
+                      <a:headEnd type="none" w="med" len="med"/>
+                      <a:tailEnd type="none" w="med" len="med"/>
+                    </a:lnL>
+                    <a:lnR w="7620" cap="flat" cmpd="sng" algn="ctr">
+                      <a:solidFill>
+                        <a:schemeClr val="bg1"/>
+                      </a:solidFill>
+                      <a:prstDash val="solid"/>
+                      <a:round/>
+                      <a:headEnd type="none" w="med" len="med"/>
+                      <a:tailEnd type="none" w="med" len="med"/>
+                    </a:lnR>
+                    <a:lnT w="7620" cap="flat" cmpd="sng" algn="ctr">
+                      <a:solidFill>
+                        <a:schemeClr val="bg1"/>
+                      </a:solidFill>
+                      <a:prstDash val="solid"/>
+                      <a:round/>
+                      <a:headEnd type="none" w="med" len="med"/>
+                      <a:tailEnd type="none" w="med" len="med"/>
+                    </a:lnT>
+                    <a:lnB w="7620" cap="flat" cmpd="sng" algn="ctr">
+                      <a:solidFill>
+                        <a:schemeClr val="bg1"/>
+                      </a:solidFill>
+                      <a:prstDash val="solid"/>
+                      <a:round/>
+                      <a:headEnd type="none" w="med" len="med"/>
+                      <a:tailEnd type="none" w="med" len="med"/>
+                    </a:lnB>
+                    <a:noFill/>
+                  </a:tcPr>
+                </a:tc>
+                <a:tc>
+                  <a:txBody>
+                    <a:bodyPr/>
+                    <a:lstStyle/>
+                    <a:p>
+                      <a:pPr rtl="0">
+                        <a:buNone/>
+                      </a:pPr>
+                      <a:r>
+                        <a:rPr lang="fr-CH" sz="1100" b="1">
+                          <a:solidFill>
+                            <a:srgbClr val="1F1F1F"/>
+                          </a:solidFill>
+                          <a:effectLst/>
+                          <a:latin typeface="Google Sans Text"/>
+                        </a:rPr>
+                        <a:t>Medium:</a:t>
+                      </a:r>
+                      <a:r>
+                        <a:rPr lang="fr-CH" sz="1100">
+                          <a:solidFill>
+                            <a:srgbClr val="1F1F1F"/>
+                          </a:solidFill>
+                          <a:effectLst/>
+                          <a:latin typeface="Google Sans Text"/>
+                        </a:rPr>
+                        <a:t> Better for constant data.</a:t>
+                      </a:r>
+                    </a:p>
+                  </a:txBody>
+                  <a:tcPr marL="55549" marR="55549" marT="74065" marB="74065" anchor="ctr">
+                    <a:lnL w="7620" cap="flat" cmpd="sng" algn="ctr">
+                      <a:solidFill>
+                        <a:schemeClr val="bg1"/>
+                      </a:solidFill>
+                      <a:prstDash val="solid"/>
+                      <a:round/>
+                      <a:headEnd type="none" w="med" len="med"/>
+                      <a:tailEnd type="none" w="med" len="med"/>
+                    </a:lnL>
+                    <a:lnR w="7620" cap="flat" cmpd="sng" algn="ctr">
+                      <a:solidFill>
+                        <a:schemeClr val="bg1"/>
+                      </a:solidFill>
+                      <a:prstDash val="solid"/>
+                      <a:round/>
+                      <a:headEnd type="none" w="med" len="med"/>
+                      <a:tailEnd type="none" w="med" len="med"/>
+                    </a:lnR>
+                    <a:lnT w="7620" cap="flat" cmpd="sng" algn="ctr">
+                      <a:solidFill>
+                        <a:schemeClr val="bg1"/>
+                      </a:solidFill>
+                      <a:prstDash val="solid"/>
+                      <a:round/>
+                      <a:headEnd type="none" w="med" len="med"/>
+                      <a:tailEnd type="none" w="med" len="med"/>
+                    </a:lnT>
+                    <a:lnB w="7620" cap="flat" cmpd="sng" algn="ctr">
+                      <a:solidFill>
+                        <a:schemeClr val="bg1"/>
+                      </a:solidFill>
+                      <a:prstDash val="solid"/>
+                      <a:round/>
+                      <a:headEnd type="none" w="med" len="med"/>
+                      <a:tailEnd type="none" w="med" len="med"/>
+                    </a:lnB>
+                    <a:noFill/>
+                  </a:tcPr>
+                </a:tc>
+                <a:tc>
+                  <a:txBody>
+                    <a:bodyPr/>
+                    <a:lstStyle/>
+                    <a:p>
+                      <a:pPr rtl="0">
+                        <a:buNone/>
+                      </a:pPr>
+                      <a:r>
+                        <a:rPr lang="en-US" sz="1100" b="1">
+                          <a:solidFill>
+                            <a:srgbClr val="1F1F1F"/>
+                          </a:solidFill>
+                          <a:effectLst/>
+                          <a:latin typeface="Google Sans Text"/>
+                        </a:rPr>
+                        <a:t>Very Low:</a:t>
+                      </a:r>
+                      <a:r>
+                        <a:rPr lang="en-US" sz="1100">
+                          <a:solidFill>
+                            <a:srgbClr val="1F1F1F"/>
+                          </a:solidFill>
+                          <a:effectLst/>
+                          <a:latin typeface="Google Sans Text"/>
+                        </a:rPr>
+                        <a:t> Optimized for "Low-Bandwidth" IoT.</a:t>
+                      </a:r>
+                    </a:p>
+                  </a:txBody>
+                  <a:tcPr marL="55549" marR="55549" marT="74065" marB="74065" anchor="ctr">
+                    <a:lnL w="7620" cap="flat" cmpd="sng" algn="ctr">
+                      <a:solidFill>
+                        <a:schemeClr val="bg1"/>
+                      </a:solidFill>
+                      <a:prstDash val="solid"/>
+                      <a:round/>
+                      <a:headEnd type="none" w="med" len="med"/>
+                      <a:tailEnd type="none" w="med" len="med"/>
+                    </a:lnL>
+                    <a:lnR w="7620" cap="flat" cmpd="sng" algn="ctr">
+                      <a:solidFill>
+                        <a:schemeClr val="bg1"/>
+                      </a:solidFill>
+                      <a:prstDash val="solid"/>
+                      <a:round/>
+                      <a:headEnd type="none" w="med" len="med"/>
+                      <a:tailEnd type="none" w="med" len="med"/>
+                    </a:lnR>
+                    <a:lnT w="7620" cap="flat" cmpd="sng" algn="ctr">
+                      <a:solidFill>
+                        <a:schemeClr val="bg1"/>
+                      </a:solidFill>
+                      <a:prstDash val="solid"/>
+                      <a:round/>
+                      <a:headEnd type="none" w="med" len="med"/>
+                      <a:tailEnd type="none" w="med" len="med"/>
+                    </a:lnT>
+                    <a:lnB w="7620" cap="flat" cmpd="sng" algn="ctr">
+                      <a:solidFill>
+                        <a:schemeClr val="bg1"/>
+                      </a:solidFill>
+                      <a:prstDash val="solid"/>
+                      <a:round/>
+                      <a:headEnd type="none" w="med" len="med"/>
+                      <a:tailEnd type="none" w="med" len="med"/>
+                    </a:lnB>
+                    <a:noFill/>
+                  </a:tcPr>
+                </a:tc>
+                <a:extLst>
+                  <a:ext uri="{0D108BD9-81ED-4DB2-BD59-A6C34878D82A}">
+                    <a16:rowId xmlns:a16="http://schemas.microsoft.com/office/drawing/2014/main" val="1270916384"/>
+                  </a:ext>
+                </a:extLst>
+              </a:tr>
+              <a:tr h="648072">
+                <a:tc>
+                  <a:txBody>
+                    <a:bodyPr/>
+                    <a:lstStyle/>
+                    <a:p>
+                      <a:pPr rtl="0">
+                        <a:buNone/>
+                      </a:pPr>
+                      <a:r>
+                        <a:rPr lang="fr-CH" sz="1100" b="1">
+                          <a:solidFill>
+                            <a:srgbClr val="1F1F1F"/>
+                          </a:solidFill>
+                          <a:effectLst/>
+                          <a:latin typeface="Google Sans Text"/>
+                        </a:rPr>
+                        <a:t>Real-Time Speed</a:t>
+                      </a:r>
+                      <a:endParaRPr lang="fr-CH" sz="1100">
+                        <a:solidFill>
+                          <a:srgbClr val="1F1F1F"/>
+                        </a:solidFill>
+                        <a:effectLst/>
+                        <a:latin typeface="Google Sans Text"/>
+                      </a:endParaRPr>
+                    </a:p>
+                  </a:txBody>
+                  <a:tcPr marL="55549" marR="55549" marT="74065" marB="74065" anchor="ctr">
+                    <a:lnL w="7620" cap="flat" cmpd="sng" algn="ctr">
+                      <a:solidFill>
+                        <a:schemeClr val="bg1"/>
+                      </a:solidFill>
+                      <a:prstDash val="solid"/>
+                      <a:round/>
+                      <a:headEnd type="none" w="med" len="med"/>
+                      <a:tailEnd type="none" w="med" len="med"/>
+                    </a:lnL>
+                    <a:lnR w="7620" cap="flat" cmpd="sng" algn="ctr">
+                      <a:solidFill>
+                        <a:schemeClr val="bg1"/>
+                      </a:solidFill>
+                      <a:prstDash val="solid"/>
+                      <a:round/>
+                      <a:headEnd type="none" w="med" len="med"/>
+                      <a:tailEnd type="none" w="med" len="med"/>
+                    </a:lnR>
+                    <a:lnT w="7620" cap="flat" cmpd="sng" algn="ctr">
+                      <a:solidFill>
+                        <a:schemeClr val="bg1"/>
+                      </a:solidFill>
+                      <a:prstDash val="solid"/>
+                      <a:round/>
+                      <a:headEnd type="none" w="med" len="med"/>
+                      <a:tailEnd type="none" w="med" len="med"/>
+                    </a:lnT>
+                    <a:lnB w="7620" cap="flat" cmpd="sng" algn="ctr">
+                      <a:solidFill>
+                        <a:schemeClr val="bg1"/>
+                      </a:solidFill>
+                      <a:prstDash val="solid"/>
+                      <a:round/>
+                      <a:headEnd type="none" w="med" len="med"/>
+                      <a:tailEnd type="none" w="med" len="med"/>
+                    </a:lnB>
+                    <a:noFill/>
+                  </a:tcPr>
+                </a:tc>
+                <a:tc>
+                  <a:txBody>
+                    <a:bodyPr/>
+                    <a:lstStyle/>
+                    <a:p>
+                      <a:pPr rtl="0">
+                        <a:buNone/>
+                      </a:pPr>
+                      <a:r>
+                        <a:rPr lang="en-US" sz="1100" b="1">
+                          <a:solidFill>
+                            <a:srgbClr val="1F1F1F"/>
+                          </a:solidFill>
+                          <a:effectLst/>
+                          <a:latin typeface="Google Sans Text"/>
+                        </a:rPr>
+                        <a:t>Slow:</a:t>
+                      </a:r>
+                      <a:r>
+                        <a:rPr lang="en-US" sz="1100">
+                          <a:solidFill>
+                            <a:srgbClr val="1F1F1F"/>
+                          </a:solidFill>
+                          <a:effectLst/>
+                          <a:latin typeface="Google Sans Text"/>
+                        </a:rPr>
+                        <a:t> Latency due to opening/closing connections.</a:t>
+                      </a:r>
+                    </a:p>
+                  </a:txBody>
+                  <a:tcPr marL="55549" marR="55549" marT="74065" marB="74065" anchor="ctr">
+                    <a:lnL w="7620" cap="flat" cmpd="sng" algn="ctr">
+                      <a:solidFill>
+                        <a:schemeClr val="bg1"/>
+                      </a:solidFill>
+                      <a:prstDash val="solid"/>
+                      <a:round/>
+                      <a:headEnd type="none" w="med" len="med"/>
+                      <a:tailEnd type="none" w="med" len="med"/>
+                    </a:lnL>
+                    <a:lnR w="7620" cap="flat" cmpd="sng" algn="ctr">
+                      <a:solidFill>
+                        <a:schemeClr val="bg1"/>
+                      </a:solidFill>
+                      <a:prstDash val="solid"/>
+                      <a:round/>
+                      <a:headEnd type="none" w="med" len="med"/>
+                      <a:tailEnd type="none" w="med" len="med"/>
+                    </a:lnR>
+                    <a:lnT w="7620" cap="flat" cmpd="sng" algn="ctr">
+                      <a:solidFill>
+                        <a:schemeClr val="bg1"/>
+                      </a:solidFill>
+                      <a:prstDash val="solid"/>
+                      <a:round/>
+                      <a:headEnd type="none" w="med" len="med"/>
+                      <a:tailEnd type="none" w="med" len="med"/>
+                    </a:lnT>
+                    <a:lnB w="7620" cap="flat" cmpd="sng" algn="ctr">
+                      <a:solidFill>
+                        <a:schemeClr val="bg1"/>
+                      </a:solidFill>
+                      <a:prstDash val="solid"/>
+                      <a:round/>
+                      <a:headEnd type="none" w="med" len="med"/>
+                      <a:tailEnd type="none" w="med" len="med"/>
+                    </a:lnB>
+                    <a:noFill/>
+                  </a:tcPr>
+                </a:tc>
+                <a:tc>
+                  <a:txBody>
+                    <a:bodyPr/>
+                    <a:lstStyle/>
+                    <a:p>
+                      <a:pPr rtl="0">
+                        <a:buNone/>
+                      </a:pPr>
+                      <a:r>
+                        <a:rPr lang="en-US" sz="1100" b="1">
+                          <a:solidFill>
+                            <a:srgbClr val="1F1F1F"/>
+                          </a:solidFill>
+                          <a:effectLst/>
+                          <a:latin typeface="Google Sans Text"/>
+                        </a:rPr>
+                        <a:t>Fastest:</a:t>
+                      </a:r>
+                      <a:r>
+                        <a:rPr lang="en-US" sz="1100">
+                          <a:solidFill>
+                            <a:srgbClr val="1F1F1F"/>
+                          </a:solidFill>
+                          <a:effectLst/>
+                          <a:latin typeface="Google Sans Text"/>
+                        </a:rPr>
+                        <a:t> Immediate delivery in both directions.</a:t>
+                      </a:r>
+                    </a:p>
+                  </a:txBody>
+                  <a:tcPr marL="55549" marR="55549" marT="74065" marB="74065" anchor="ctr">
+                    <a:lnL w="7620" cap="flat" cmpd="sng" algn="ctr">
+                      <a:solidFill>
+                        <a:schemeClr val="bg1"/>
+                      </a:solidFill>
+                      <a:prstDash val="solid"/>
+                      <a:round/>
+                      <a:headEnd type="none" w="med" len="med"/>
+                      <a:tailEnd type="none" w="med" len="med"/>
+                    </a:lnL>
+                    <a:lnR w="7620" cap="flat" cmpd="sng" algn="ctr">
+                      <a:solidFill>
+                        <a:schemeClr val="bg1"/>
+                      </a:solidFill>
+                      <a:prstDash val="solid"/>
+                      <a:round/>
+                      <a:headEnd type="none" w="med" len="med"/>
+                      <a:tailEnd type="none" w="med" len="med"/>
+                    </a:lnR>
+                    <a:lnT w="7620" cap="flat" cmpd="sng" algn="ctr">
+                      <a:solidFill>
+                        <a:schemeClr val="bg1"/>
+                      </a:solidFill>
+                      <a:prstDash val="solid"/>
+                      <a:round/>
+                      <a:headEnd type="none" w="med" len="med"/>
+                      <a:tailEnd type="none" w="med" len="med"/>
+                    </a:lnT>
+                    <a:lnB w="7620" cap="flat" cmpd="sng" algn="ctr">
+                      <a:solidFill>
+                        <a:schemeClr val="bg1"/>
+                      </a:solidFill>
+                      <a:prstDash val="solid"/>
+                      <a:round/>
+                      <a:headEnd type="none" w="med" len="med"/>
+                      <a:tailEnd type="none" w="med" len="med"/>
+                    </a:lnB>
+                    <a:noFill/>
+                  </a:tcPr>
+                </a:tc>
+                <a:tc>
+                  <a:txBody>
+                    <a:bodyPr/>
+                    <a:lstStyle/>
+                    <a:p>
+                      <a:pPr rtl="0">
+                        <a:buNone/>
+                      </a:pPr>
+                      <a:r>
+                        <a:rPr lang="en-US" sz="1100" b="1">
+                          <a:solidFill>
+                            <a:srgbClr val="1F1F1F"/>
+                          </a:solidFill>
+                          <a:effectLst/>
+                          <a:latin typeface="Google Sans Text"/>
+                        </a:rPr>
+                        <a:t>Fast:</a:t>
+                      </a:r>
+                      <a:r>
+                        <a:rPr lang="en-US" sz="1100">
+                          <a:solidFill>
+                            <a:srgbClr val="1F1F1F"/>
+                          </a:solidFill>
+                          <a:effectLst/>
+                          <a:latin typeface="Google Sans Text"/>
+                        </a:rPr>
+                        <a:t> Highly efficient for "push" notifications.</a:t>
+                      </a:r>
+                    </a:p>
+                  </a:txBody>
+                  <a:tcPr marL="55549" marR="55549" marT="74065" marB="74065" anchor="ctr">
+                    <a:lnL w="7620" cap="flat" cmpd="sng" algn="ctr">
+                      <a:solidFill>
+                        <a:schemeClr val="bg1"/>
+                      </a:solidFill>
+                      <a:prstDash val="solid"/>
+                      <a:round/>
+                      <a:headEnd type="none" w="med" len="med"/>
+                      <a:tailEnd type="none" w="med" len="med"/>
+                    </a:lnL>
+                    <a:lnR w="7620" cap="flat" cmpd="sng" algn="ctr">
+                      <a:solidFill>
+                        <a:schemeClr val="bg1"/>
+                      </a:solidFill>
+                      <a:prstDash val="solid"/>
+                      <a:round/>
+                      <a:headEnd type="none" w="med" len="med"/>
+                      <a:tailEnd type="none" w="med" len="med"/>
+                    </a:lnR>
+                    <a:lnT w="7620" cap="flat" cmpd="sng" algn="ctr">
+                      <a:solidFill>
+                        <a:schemeClr val="bg1"/>
+                      </a:solidFill>
+                      <a:prstDash val="solid"/>
+                      <a:round/>
+                      <a:headEnd type="none" w="med" len="med"/>
+                      <a:tailEnd type="none" w="med" len="med"/>
+                    </a:lnT>
+                    <a:lnB w="7620" cap="flat" cmpd="sng" algn="ctr">
+                      <a:solidFill>
+                        <a:schemeClr val="bg1"/>
+                      </a:solidFill>
+                      <a:prstDash val="solid"/>
+                      <a:round/>
+                      <a:headEnd type="none" w="med" len="med"/>
+                      <a:tailEnd type="none" w="med" len="med"/>
+                    </a:lnB>
+                    <a:noFill/>
+                  </a:tcPr>
+                </a:tc>
+                <a:extLst>
+                  <a:ext uri="{0D108BD9-81ED-4DB2-BD59-A6C34878D82A}">
+                    <a16:rowId xmlns:a16="http://schemas.microsoft.com/office/drawing/2014/main" val="3456667932"/>
+                  </a:ext>
+                </a:extLst>
+              </a:tr>
+              <a:tr h="648072">
+                <a:tc>
+                  <a:txBody>
+                    <a:bodyPr/>
+                    <a:lstStyle/>
+                    <a:p>
+                      <a:pPr rtl="0">
+                        <a:buNone/>
+                      </a:pPr>
+                      <a:r>
+                        <a:rPr lang="fr-CH" sz="1100" b="1">
+                          <a:solidFill>
+                            <a:srgbClr val="1F1F1F"/>
+                          </a:solidFill>
+                          <a:effectLst/>
+                          <a:latin typeface="Google Sans Text"/>
+                        </a:rPr>
+                        <a:t>Complexity</a:t>
+                      </a:r>
+                      <a:endParaRPr lang="fr-CH" sz="1100">
+                        <a:solidFill>
+                          <a:srgbClr val="1F1F1F"/>
+                        </a:solidFill>
+                        <a:effectLst/>
+                        <a:latin typeface="Google Sans Text"/>
+                      </a:endParaRPr>
+                    </a:p>
+                  </a:txBody>
+                  <a:tcPr marL="55549" marR="55549" marT="74065" marB="74065" anchor="ctr">
+                    <a:lnL w="7620" cap="flat" cmpd="sng" algn="ctr">
+                      <a:solidFill>
+                        <a:schemeClr val="bg1"/>
+                      </a:solidFill>
+                      <a:prstDash val="solid"/>
+                      <a:round/>
+                      <a:headEnd type="none" w="med" len="med"/>
+                      <a:tailEnd type="none" w="med" len="med"/>
+                    </a:lnL>
+                    <a:lnR w="7620" cap="flat" cmpd="sng" algn="ctr">
+                      <a:solidFill>
+                        <a:schemeClr val="bg1"/>
+                      </a:solidFill>
+                      <a:prstDash val="solid"/>
+                      <a:round/>
+                      <a:headEnd type="none" w="med" len="med"/>
+                      <a:tailEnd type="none" w="med" len="med"/>
+                    </a:lnR>
+                    <a:lnT w="7620" cap="flat" cmpd="sng" algn="ctr">
+                      <a:solidFill>
+                        <a:schemeClr val="bg1"/>
+                      </a:solidFill>
+                      <a:prstDash val="solid"/>
+                      <a:round/>
+                      <a:headEnd type="none" w="med" len="med"/>
+                      <a:tailEnd type="none" w="med" len="med"/>
+                    </a:lnT>
+                    <a:lnB w="7620" cap="flat" cmpd="sng" algn="ctr">
+                      <a:solidFill>
+                        <a:schemeClr val="bg1"/>
+                      </a:solidFill>
+                      <a:prstDash val="solid"/>
+                      <a:round/>
+                      <a:headEnd type="none" w="med" len="med"/>
+                      <a:tailEnd type="none" w="med" len="med"/>
+                    </a:lnB>
+                    <a:noFill/>
+                  </a:tcPr>
+                </a:tc>
+                <a:tc>
+                  <a:txBody>
+                    <a:bodyPr/>
+                    <a:lstStyle/>
+                    <a:p>
+                      <a:pPr rtl="0">
+                        <a:buNone/>
+                      </a:pPr>
+                      <a:r>
+                        <a:rPr lang="fr-CH" sz="1100">
+                          <a:solidFill>
+                            <a:srgbClr val="1F1F1F"/>
+                          </a:solidFill>
+                          <a:effectLst/>
+                          <a:latin typeface="Google Sans Text"/>
+                        </a:rPr>
+                        <a:t>Simple (Most common protocol).</a:t>
+                      </a:r>
+                    </a:p>
+                  </a:txBody>
+                  <a:tcPr marL="55549" marR="55549" marT="74065" marB="74065" anchor="ctr">
+                    <a:lnL w="7620" cap="flat" cmpd="sng" algn="ctr">
+                      <a:solidFill>
+                        <a:schemeClr val="bg1"/>
+                      </a:solidFill>
+                      <a:prstDash val="solid"/>
+                      <a:round/>
+                      <a:headEnd type="none" w="med" len="med"/>
+                      <a:tailEnd type="none" w="med" len="med"/>
+                    </a:lnL>
+                    <a:lnR w="7620" cap="flat" cmpd="sng" algn="ctr">
+                      <a:solidFill>
+                        <a:schemeClr val="bg1"/>
+                      </a:solidFill>
+                      <a:prstDash val="solid"/>
+                      <a:round/>
+                      <a:headEnd type="none" w="med" len="med"/>
+                      <a:tailEnd type="none" w="med" len="med"/>
+                    </a:lnR>
+                    <a:lnT w="7620" cap="flat" cmpd="sng" algn="ctr">
+                      <a:solidFill>
+                        <a:schemeClr val="bg1"/>
+                      </a:solidFill>
+                      <a:prstDash val="solid"/>
+                      <a:round/>
+                      <a:headEnd type="none" w="med" len="med"/>
+                      <a:tailEnd type="none" w="med" len="med"/>
+                    </a:lnT>
+                    <a:lnB w="7620" cap="flat" cmpd="sng" algn="ctr">
+                      <a:solidFill>
+                        <a:schemeClr val="bg1"/>
+                      </a:solidFill>
+                      <a:prstDash val="solid"/>
+                      <a:round/>
+                      <a:headEnd type="none" w="med" len="med"/>
+                      <a:tailEnd type="none" w="med" len="med"/>
+                    </a:lnB>
+                    <a:noFill/>
+                  </a:tcPr>
+                </a:tc>
+                <a:tc>
+                  <a:txBody>
+                    <a:bodyPr/>
+                    <a:lstStyle/>
+                    <a:p>
+                      <a:pPr rtl="0">
+                        <a:buNone/>
+                      </a:pPr>
+                      <a:r>
+                        <a:rPr lang="en-US" sz="1100">
+                          <a:solidFill>
+                            <a:srgbClr val="1F1F1F"/>
+                          </a:solidFill>
+                          <a:effectLst/>
+                          <a:latin typeface="Google Sans Text"/>
+                        </a:rPr>
+                        <a:t>High (Requires handling stateful connections).</a:t>
+                      </a:r>
+                    </a:p>
+                  </a:txBody>
+                  <a:tcPr marL="55549" marR="55549" marT="74065" marB="74065" anchor="ctr">
+                    <a:lnL w="7620" cap="flat" cmpd="sng" algn="ctr">
+                      <a:solidFill>
+                        <a:schemeClr val="bg1"/>
+                      </a:solidFill>
+                      <a:prstDash val="solid"/>
+                      <a:round/>
+                      <a:headEnd type="none" w="med" len="med"/>
+                      <a:tailEnd type="none" w="med" len="med"/>
+                    </a:lnL>
+                    <a:lnR w="7620" cap="flat" cmpd="sng" algn="ctr">
+                      <a:solidFill>
+                        <a:schemeClr val="bg1"/>
+                      </a:solidFill>
+                      <a:prstDash val="solid"/>
+                      <a:round/>
+                      <a:headEnd type="none" w="med" len="med"/>
+                      <a:tailEnd type="none" w="med" len="med"/>
+                    </a:lnR>
+                    <a:lnT w="7620" cap="flat" cmpd="sng" algn="ctr">
+                      <a:solidFill>
+                        <a:schemeClr val="bg1"/>
+                      </a:solidFill>
+                      <a:prstDash val="solid"/>
+                      <a:round/>
+                      <a:headEnd type="none" w="med" len="med"/>
+                      <a:tailEnd type="none" w="med" len="med"/>
+                    </a:lnT>
+                    <a:lnB w="7620" cap="flat" cmpd="sng" algn="ctr">
+                      <a:solidFill>
+                        <a:schemeClr val="bg1"/>
+                      </a:solidFill>
+                      <a:prstDash val="solid"/>
+                      <a:round/>
+                      <a:headEnd type="none" w="med" len="med"/>
+                      <a:tailEnd type="none" w="med" len="med"/>
+                    </a:lnB>
+                    <a:noFill/>
+                  </a:tcPr>
+                </a:tc>
+                <a:tc>
+                  <a:txBody>
+                    <a:bodyPr/>
+                    <a:lstStyle/>
+                    <a:p>
+                      <a:pPr rtl="0">
+                        <a:buNone/>
+                      </a:pPr>
+                      <a:r>
+                        <a:rPr lang="en-US" sz="1100">
+                          <a:solidFill>
+                            <a:srgbClr val="1F1F1F"/>
+                          </a:solidFill>
+                          <a:effectLst/>
+                          <a:latin typeface="Google Sans Text"/>
+                        </a:rPr>
+                        <a:t>Moderate (Requires an external Broker like HiveMQ).</a:t>
+                      </a:r>
+                    </a:p>
+                  </a:txBody>
+                  <a:tcPr marL="55549" marR="55549" marT="74065" marB="74065" anchor="ctr">
+                    <a:lnL w="7620" cap="flat" cmpd="sng" algn="ctr">
+                      <a:solidFill>
+                        <a:schemeClr val="bg1"/>
+                      </a:solidFill>
+                      <a:prstDash val="solid"/>
+                      <a:round/>
+                      <a:headEnd type="none" w="med" len="med"/>
+                      <a:tailEnd type="none" w="med" len="med"/>
+                    </a:lnL>
+                    <a:lnR w="7620" cap="flat" cmpd="sng" algn="ctr">
+                      <a:solidFill>
+                        <a:schemeClr val="bg1"/>
+                      </a:solidFill>
+                      <a:prstDash val="solid"/>
+                      <a:round/>
+                      <a:headEnd type="none" w="med" len="med"/>
+                      <a:tailEnd type="none" w="med" len="med"/>
+                    </a:lnR>
+                    <a:lnT w="7620" cap="flat" cmpd="sng" algn="ctr">
+                      <a:solidFill>
+                        <a:schemeClr val="bg1"/>
+                      </a:solidFill>
+                      <a:prstDash val="solid"/>
+                      <a:round/>
+                      <a:headEnd type="none" w="med" len="med"/>
+                      <a:tailEnd type="none" w="med" len="med"/>
+                    </a:lnT>
+                    <a:lnB w="7620" cap="flat" cmpd="sng" algn="ctr">
+                      <a:solidFill>
+                        <a:schemeClr val="bg1"/>
+                      </a:solidFill>
+                      <a:prstDash val="solid"/>
+                      <a:round/>
+                      <a:headEnd type="none" w="med" len="med"/>
+                      <a:tailEnd type="none" w="med" len="med"/>
+                    </a:lnB>
+                    <a:noFill/>
+                  </a:tcPr>
+                </a:tc>
+                <a:extLst>
+                  <a:ext uri="{0D108BD9-81ED-4DB2-BD59-A6C34878D82A}">
+                    <a16:rowId xmlns:a16="http://schemas.microsoft.com/office/drawing/2014/main" val="2993518948"/>
+                  </a:ext>
+                </a:extLst>
+              </a:tr>
+              <a:tr h="648072">
+                <a:tc>
+                  <a:txBody>
+                    <a:bodyPr/>
+                    <a:lstStyle/>
+                    <a:p>
+                      <a:pPr rtl="0">
+                        <a:buNone/>
+                      </a:pPr>
+                      <a:r>
+                        <a:rPr lang="fr-CH" sz="1100" b="1">
+                          <a:solidFill>
+                            <a:srgbClr val="1F1F1F"/>
+                          </a:solidFill>
+                          <a:effectLst/>
+                          <a:latin typeface="Google Sans Text"/>
+                        </a:rPr>
+                        <a:t>Best Use Case</a:t>
+                      </a:r>
+                      <a:endParaRPr lang="fr-CH" sz="1100">
+                        <a:solidFill>
+                          <a:srgbClr val="1F1F1F"/>
+                        </a:solidFill>
+                        <a:effectLst/>
+                        <a:latin typeface="Google Sans Text"/>
+                      </a:endParaRPr>
+                    </a:p>
+                  </a:txBody>
+                  <a:tcPr marL="55549" marR="55549" marT="74065" marB="74065" anchor="ctr">
+                    <a:lnL w="7620" cap="flat" cmpd="sng" algn="ctr">
+                      <a:solidFill>
+                        <a:schemeClr val="bg1"/>
+                      </a:solidFill>
+                      <a:prstDash val="solid"/>
+                      <a:round/>
+                      <a:headEnd type="none" w="med" len="med"/>
+                      <a:tailEnd type="none" w="med" len="med"/>
+                    </a:lnL>
+                    <a:lnR w="7620" cap="flat" cmpd="sng" algn="ctr">
+                      <a:solidFill>
+                        <a:schemeClr val="bg1"/>
+                      </a:solidFill>
+                      <a:prstDash val="solid"/>
+                      <a:round/>
+                      <a:headEnd type="none" w="med" len="med"/>
+                      <a:tailEnd type="none" w="med" len="med"/>
+                    </a:lnR>
+                    <a:lnT w="7620" cap="flat" cmpd="sng" algn="ctr">
+                      <a:solidFill>
+                        <a:schemeClr val="bg1"/>
+                      </a:solidFill>
+                      <a:prstDash val="solid"/>
+                      <a:round/>
+                      <a:headEnd type="none" w="med" len="med"/>
+                      <a:tailEnd type="none" w="med" len="med"/>
+                    </a:lnT>
+                    <a:lnB w="7620" cap="flat" cmpd="sng" algn="ctr">
+                      <a:solidFill>
+                        <a:schemeClr val="bg1"/>
+                      </a:solidFill>
+                      <a:prstDash val="solid"/>
+                      <a:round/>
+                      <a:headEnd type="none" w="med" len="med"/>
+                      <a:tailEnd type="none" w="med" len="med"/>
+                    </a:lnB>
+                    <a:noFill/>
+                  </a:tcPr>
+                </a:tc>
+                <a:tc>
+                  <a:txBody>
+                    <a:bodyPr/>
+                    <a:lstStyle/>
+                    <a:p>
+                      <a:pPr rtl="0">
+                        <a:buNone/>
+                      </a:pPr>
+                      <a:r>
+                        <a:rPr lang="en-US" sz="1100">
+                          <a:solidFill>
+                            <a:srgbClr val="1F1F1F"/>
+                          </a:solidFill>
+                          <a:effectLst/>
+                          <a:latin typeface="Google Sans Text"/>
+                        </a:rPr>
+                        <a:t>Fetching a webpage or checking a weather API.</a:t>
+                      </a:r>
+                    </a:p>
+                  </a:txBody>
+                  <a:tcPr marL="55549" marR="55549" marT="74065" marB="74065" anchor="ctr">
+                    <a:lnL w="7620" cap="flat" cmpd="sng" algn="ctr">
+                      <a:solidFill>
+                        <a:schemeClr val="bg1"/>
+                      </a:solidFill>
+                      <a:prstDash val="solid"/>
+                      <a:round/>
+                      <a:headEnd type="none" w="med" len="med"/>
+                      <a:tailEnd type="none" w="med" len="med"/>
+                    </a:lnL>
+                    <a:lnR w="7620" cap="flat" cmpd="sng" algn="ctr">
+                      <a:solidFill>
+                        <a:schemeClr val="bg1"/>
+                      </a:solidFill>
+                      <a:prstDash val="solid"/>
+                      <a:round/>
+                      <a:headEnd type="none" w="med" len="med"/>
+                      <a:tailEnd type="none" w="med" len="med"/>
+                    </a:lnR>
+                    <a:lnT w="7620" cap="flat" cmpd="sng" algn="ctr">
+                      <a:solidFill>
+                        <a:schemeClr val="bg1"/>
+                      </a:solidFill>
+                      <a:prstDash val="solid"/>
+                      <a:round/>
+                      <a:headEnd type="none" w="med" len="med"/>
+                      <a:tailEnd type="none" w="med" len="med"/>
+                    </a:lnT>
+                    <a:lnB w="7620" cap="flat" cmpd="sng" algn="ctr">
+                      <a:solidFill>
+                        <a:schemeClr val="bg1"/>
+                      </a:solidFill>
+                      <a:prstDash val="solid"/>
+                      <a:round/>
+                      <a:headEnd type="none" w="med" len="med"/>
+                      <a:tailEnd type="none" w="med" len="med"/>
+                    </a:lnB>
+                    <a:noFill/>
+                  </a:tcPr>
+                </a:tc>
+                <a:tc>
+                  <a:txBody>
+                    <a:bodyPr/>
+                    <a:lstStyle/>
+                    <a:p>
+                      <a:pPr rtl="0">
+                        <a:buNone/>
+                      </a:pPr>
+                      <a:r>
+                        <a:rPr lang="en-US" sz="1100">
+                          <a:solidFill>
+                            <a:srgbClr val="1F1F1F"/>
+                          </a:solidFill>
+                          <a:effectLst/>
+                          <a:latin typeface="Google Sans Text"/>
+                        </a:rPr>
+                        <a:t>Real-time chat apps or live stock market tickers.</a:t>
+                      </a:r>
+                    </a:p>
+                  </a:txBody>
+                  <a:tcPr marL="55549" marR="55549" marT="74065" marB="74065" anchor="ctr">
+                    <a:lnL w="7620" cap="flat" cmpd="sng" algn="ctr">
+                      <a:solidFill>
+                        <a:schemeClr val="bg1"/>
+                      </a:solidFill>
+                      <a:prstDash val="solid"/>
+                      <a:round/>
+                      <a:headEnd type="none" w="med" len="med"/>
+                      <a:tailEnd type="none" w="med" len="med"/>
+                    </a:lnL>
+                    <a:lnR w="7620" cap="flat" cmpd="sng" algn="ctr">
+                      <a:solidFill>
+                        <a:schemeClr val="bg1"/>
+                      </a:solidFill>
+                      <a:prstDash val="solid"/>
+                      <a:round/>
+                      <a:headEnd type="none" w="med" len="med"/>
+                      <a:tailEnd type="none" w="med" len="med"/>
+                    </a:lnR>
+                    <a:lnT w="7620" cap="flat" cmpd="sng" algn="ctr">
+                      <a:solidFill>
+                        <a:schemeClr val="bg1"/>
+                      </a:solidFill>
+                      <a:prstDash val="solid"/>
+                      <a:round/>
+                      <a:headEnd type="none" w="med" len="med"/>
+                      <a:tailEnd type="none" w="med" len="med"/>
+                    </a:lnT>
+                    <a:lnB w="7620" cap="flat" cmpd="sng" algn="ctr">
+                      <a:solidFill>
+                        <a:schemeClr val="bg1"/>
+                      </a:solidFill>
+                      <a:prstDash val="solid"/>
+                      <a:round/>
+                      <a:headEnd type="none" w="med" len="med"/>
+                      <a:tailEnd type="none" w="med" len="med"/>
+                    </a:lnB>
+                    <a:noFill/>
+                  </a:tcPr>
+                </a:tc>
+                <a:tc>
+                  <a:txBody>
+                    <a:bodyPr/>
+                    <a:lstStyle/>
+                    <a:p>
+                      <a:pPr rtl="0">
+                        <a:buNone/>
+                      </a:pPr>
+                      <a:r>
+                        <a:rPr lang="en-US" sz="1100" b="1" dirty="0">
+                          <a:solidFill>
+                            <a:srgbClr val="1F1F1F"/>
+                          </a:solidFill>
+                          <a:effectLst/>
+                          <a:latin typeface="Google Sans Text"/>
+                        </a:rPr>
+                        <a:t>IoT Sensors, Hardware Control, &amp; Home Automation.</a:t>
+                      </a:r>
+                      <a:endParaRPr lang="en-US" sz="1100" dirty="0">
+                        <a:solidFill>
+                          <a:srgbClr val="1F1F1F"/>
+                        </a:solidFill>
+                        <a:effectLst/>
+                        <a:latin typeface="Google Sans Text"/>
+                      </a:endParaRPr>
+                    </a:p>
+                  </a:txBody>
+                  <a:tcPr marL="55549" marR="55549" marT="74065" marB="74065" anchor="ctr">
+                    <a:lnL w="7620" cap="flat" cmpd="sng" algn="ctr">
+                      <a:solidFill>
+                        <a:schemeClr val="bg1"/>
+                      </a:solidFill>
+                      <a:prstDash val="solid"/>
+                      <a:round/>
+                      <a:headEnd type="none" w="med" len="med"/>
+                      <a:tailEnd type="none" w="med" len="med"/>
+                    </a:lnL>
+                    <a:lnR w="7620" cap="flat" cmpd="sng" algn="ctr">
+                      <a:solidFill>
+                        <a:schemeClr val="bg1"/>
+                      </a:solidFill>
+                      <a:prstDash val="solid"/>
+                      <a:round/>
+                      <a:headEnd type="none" w="med" len="med"/>
+                      <a:tailEnd type="none" w="med" len="med"/>
+                    </a:lnR>
+                    <a:lnT w="7620" cap="flat" cmpd="sng" algn="ctr">
+                      <a:solidFill>
+                        <a:schemeClr val="bg1"/>
+                      </a:solidFill>
+                      <a:prstDash val="solid"/>
+                      <a:round/>
+                      <a:headEnd type="none" w="med" len="med"/>
+                      <a:tailEnd type="none" w="med" len="med"/>
+                    </a:lnT>
+                    <a:lnB w="7620" cap="flat" cmpd="sng" algn="ctr">
+                      <a:solidFill>
+                        <a:schemeClr val="bg1"/>
+                      </a:solidFill>
+                      <a:prstDash val="solid"/>
+                      <a:round/>
+                      <a:headEnd type="none" w="med" len="med"/>
+                      <a:tailEnd type="none" w="med" len="med"/>
+                    </a:lnB>
+                    <a:noFill/>
+                  </a:tcPr>
+                </a:tc>
+                <a:extLst>
+                  <a:ext uri="{0D108BD9-81ED-4DB2-BD59-A6C34878D82A}">
+                    <a16:rowId xmlns:a16="http://schemas.microsoft.com/office/drawing/2014/main" val="2189357627"/>
+                  </a:ext>
+                </a:extLst>
+              </a:tr>
+            </a:tbl>
+          </a:graphicData>
+        </a:graphic>
+      </p:graphicFrame>
+    </p:spTree>
+    <p:extLst>
+      <p:ext uri="{BB962C8B-B14F-4D97-AF65-F5344CB8AC3E}">
+        <p14:creationId xmlns:p14="http://schemas.microsoft.com/office/powerpoint/2010/main" val="454809472"/>
+      </p:ext>
+    </p:extLst>
+  </p:cSld>
+  <p:clrMapOvr>
+    <a:masterClrMapping/>
+  </p:clrMapOvr>
+</p:sld>
+</file>
+
+<file path=ppt/slides/slide12.xml><?xml version="1.0" encoding="utf-8"?>
+<p:sld xmlns:a="http://schemas.openxmlformats.org/drawingml/2006/main" xmlns:r="http://schemas.openxmlformats.org/officeDocument/2006/relationships" xmlns:p="http://schemas.openxmlformats.org/presentationml/2006/main">
+  <p:cSld>
+    <p:spTree>
+      <p:nvGrpSpPr>
+        <p:cNvPr id="1" name=""/>
+        <p:cNvGrpSpPr/>
+        <p:nvPr/>
+      </p:nvGrpSpPr>
+      <p:grpSpPr>
+        <a:xfrm>
+          <a:off x="0" y="0"/>
+          <a:ext cx="0" cy="0"/>
+          <a:chOff x="0" y="0"/>
+          <a:chExt cx="0" cy="0"/>
+        </a:xfrm>
+      </p:grpSpPr>
+      <p:sp>
+        <p:nvSpPr>
+          <p:cNvPr id="2" name="Titre 1">
+            <a:extLst>
+              <a:ext uri="{FF2B5EF4-FFF2-40B4-BE49-F238E27FC236}">
+                <a16:creationId xmlns:a16="http://schemas.microsoft.com/office/drawing/2014/main" id="{0A967500-8B97-F15B-6007-E7EE6270CC28}"/>
+              </a:ext>
+            </a:extLst>
+          </p:cNvPr>
+          <p:cNvSpPr>
+            <a:spLocks noGrp="1"/>
+          </p:cNvSpPr>
+          <p:nvPr>
+            <p:ph type="title"/>
+          </p:nvPr>
+        </p:nvSpPr>
+        <p:spPr/>
+        <p:txBody>
+          <a:bodyPr/>
+          <a:lstStyle/>
+          <a:p>
+            <a:endParaRPr lang="fr-CH" dirty="0"/>
+          </a:p>
+        </p:txBody>
+      </p:sp>
+      <p:sp>
+        <p:nvSpPr>
+          <p:cNvPr id="3" name="Espace réservé du contenu 2">
+            <a:extLst>
+              <a:ext uri="{FF2B5EF4-FFF2-40B4-BE49-F238E27FC236}">
+                <a16:creationId xmlns:a16="http://schemas.microsoft.com/office/drawing/2014/main" id="{1CDB8DFC-73FE-7141-8FD7-642B23DE9F15}"/>
+              </a:ext>
+            </a:extLst>
+          </p:cNvPr>
+          <p:cNvSpPr>
+            <a:spLocks noGrp="1"/>
+          </p:cNvSpPr>
+          <p:nvPr>
+            <p:ph idx="1"/>
+          </p:nvPr>
+        </p:nvSpPr>
+        <p:spPr/>
+        <p:txBody>
+          <a:bodyPr>
+            <a:normAutofit fontScale="55000" lnSpcReduction="20000"/>
+          </a:bodyPr>
+          <a:lstStyle/>
+          <a:p>
+            <a:pPr marL="0" indent="0">
+              <a:buNone/>
+            </a:pPr>
+            <a:r>
+              <a:rPr lang="en-US" b="1" dirty="0">
+                <a:highlight>
+                  <a:srgbClr val="FFFF00"/>
+                </a:highlight>
+              </a:rPr>
+              <a:t>1. HTTP: The "On-Demand" Protocol</a:t>
+            </a:r>
+          </a:p>
+          <a:p>
+            <a:r>
+              <a:rPr lang="en-US" dirty="0"/>
+              <a:t>Think of HTTP like a </a:t>
+            </a:r>
+            <a:r>
+              <a:rPr lang="en-US" b="1" dirty="0"/>
+              <a:t>vending machine</a:t>
+            </a:r>
+            <a:r>
+              <a:rPr lang="en-US" dirty="0"/>
+              <a:t>. You walk up, put in a request, get your snack, and walk away.</a:t>
+            </a:r>
+          </a:p>
+          <a:p>
+            <a:r>
+              <a:rPr lang="en-US" b="1" dirty="0"/>
+              <a:t>Why it's bad for your heater:</a:t>
+            </a:r>
+            <a:r>
+              <a:rPr lang="en-US" dirty="0"/>
+              <a:t> If you want the heater to turn off </a:t>
+            </a:r>
+            <a:r>
+              <a:rPr lang="en-US" i="1" dirty="0"/>
+              <a:t>immediately</a:t>
+            </a:r>
+            <a:r>
+              <a:rPr lang="en-US" dirty="0"/>
+              <a:t> when a button is pressed on your phone, the Arduino would have to ask the server "Should I be off?" every single second (this is called </a:t>
+            </a:r>
+            <a:r>
+              <a:rPr lang="en-US" b="1" dirty="0"/>
+              <a:t>Polling</a:t>
+            </a:r>
+            <a:r>
+              <a:rPr lang="en-US" dirty="0"/>
+              <a:t>). It wastes a lot of energy and </a:t>
+            </a:r>
+            <a:r>
+              <a:rPr lang="en-US" dirty="0" err="1"/>
+              <a:t>WiFi</a:t>
+            </a:r>
+            <a:r>
+              <a:rPr lang="en-US" dirty="0"/>
+              <a:t> bandwidth.</a:t>
+            </a:r>
+          </a:p>
+          <a:p>
+            <a:pPr marL="0" indent="0">
+              <a:buNone/>
+            </a:pPr>
+            <a:r>
+              <a:rPr lang="en-US" b="1" dirty="0">
+                <a:highlight>
+                  <a:srgbClr val="FFFF00"/>
+                </a:highlight>
+              </a:rPr>
+              <a:t>2. </a:t>
+            </a:r>
+            <a:r>
+              <a:rPr lang="en-US" b="1" dirty="0" err="1">
+                <a:highlight>
+                  <a:srgbClr val="FFFF00"/>
+                </a:highlight>
+              </a:rPr>
+              <a:t>WebSockets</a:t>
+            </a:r>
+            <a:r>
+              <a:rPr lang="en-US" b="1" dirty="0">
+                <a:highlight>
+                  <a:srgbClr val="FFFF00"/>
+                </a:highlight>
+              </a:rPr>
+              <a:t>: The "Open Telephone Line"</a:t>
+            </a:r>
+          </a:p>
+          <a:p>
+            <a:r>
+              <a:rPr lang="en-US" dirty="0" err="1"/>
+              <a:t>WebSockets</a:t>
+            </a:r>
+            <a:r>
+              <a:rPr lang="en-US" dirty="0"/>
+              <a:t> are like a </a:t>
+            </a:r>
+            <a:r>
+              <a:rPr lang="en-US" b="1" dirty="0"/>
+              <a:t>phone call</a:t>
+            </a:r>
+            <a:r>
+              <a:rPr lang="en-US" dirty="0"/>
+              <a:t>. Once the call is connected, both people can talk at the exact same time without hanging up.</a:t>
+            </a:r>
+          </a:p>
+          <a:p>
+            <a:r>
+              <a:rPr lang="en-US" b="1" dirty="0"/>
+              <a:t>Why use it:</a:t>
+            </a:r>
+            <a:r>
+              <a:rPr lang="en-US" dirty="0"/>
+              <a:t> It’s great for high-speed dashboards where data is changing 60 times a second.</a:t>
+            </a:r>
+          </a:p>
+          <a:p>
+            <a:r>
+              <a:rPr lang="en-US" b="1" dirty="0"/>
+              <a:t>The Downside:</a:t>
+            </a:r>
+            <a:r>
+              <a:rPr lang="en-US" dirty="0"/>
+              <a:t> It is "stateful." If the </a:t>
+            </a:r>
+            <a:r>
+              <a:rPr lang="en-US" dirty="0" err="1"/>
+              <a:t>WiFi</a:t>
+            </a:r>
+            <a:r>
+              <a:rPr lang="en-US" dirty="0"/>
+              <a:t> flickers for a millisecond, the phone call drops, and you have to write complex code to "redial" and make sure no data was lost.</a:t>
+            </a:r>
+          </a:p>
+          <a:p>
+            <a:pPr marL="0" indent="0">
+              <a:buNone/>
+            </a:pPr>
+            <a:r>
+              <a:rPr lang="en-US" b="1" dirty="0">
+                <a:highlight>
+                  <a:srgbClr val="FFFF00"/>
+                </a:highlight>
+              </a:rPr>
+              <a:t>3. MQTT: The "Post Office" (Your Current Project)</a:t>
+            </a:r>
+          </a:p>
+          <a:p>
+            <a:r>
+              <a:rPr lang="en-US" dirty="0"/>
+              <a:t>MQTT is like a </a:t>
+            </a:r>
+            <a:r>
+              <a:rPr lang="en-US" b="1" dirty="0"/>
+              <a:t>Post Office with P.O. Boxes</a:t>
+            </a:r>
+            <a:r>
+              <a:rPr lang="en-US" dirty="0"/>
+              <a:t>. You (the Arduino) subscribe to a box called heater/commands. Whenever someone (the Node.js server) drops a letter in that box, the Post Office (</a:t>
+            </a:r>
+            <a:r>
+              <a:rPr lang="en-US" dirty="0" err="1"/>
+              <a:t>HiveMQ</a:t>
+            </a:r>
+            <a:r>
+              <a:rPr lang="en-US" dirty="0"/>
+              <a:t>) immediately runs to your house and delivers it.</a:t>
+            </a:r>
+          </a:p>
+          <a:p>
+            <a:r>
+              <a:rPr lang="en-US" b="1" dirty="0"/>
+              <a:t>The "LWT" Feature:</a:t>
+            </a:r>
+            <a:r>
+              <a:rPr lang="en-US" dirty="0"/>
+              <a:t> MQTT has a unique feature called </a:t>
+            </a:r>
+            <a:r>
+              <a:rPr lang="en-US" b="1" dirty="0"/>
+              <a:t>Last Will and Testament</a:t>
+            </a:r>
+            <a:r>
+              <a:rPr lang="en-US" dirty="0"/>
+              <a:t>. If your Arduino loses power, the Broker (</a:t>
+            </a:r>
+            <a:r>
+              <a:rPr lang="en-US" dirty="0" err="1"/>
+              <a:t>HiveMQ</a:t>
+            </a:r>
+            <a:r>
+              <a:rPr lang="en-US" dirty="0"/>
+              <a:t>) can automatically tell your server: "Hey, the Arduino just died!" HTTP and </a:t>
+            </a:r>
+            <a:r>
+              <a:rPr lang="en-US" dirty="0" err="1"/>
+              <a:t>WebSockets</a:t>
+            </a:r>
+            <a:r>
+              <a:rPr lang="en-US" dirty="0"/>
+              <a:t> cannot do this as easily.</a:t>
+            </a:r>
+          </a:p>
+          <a:p>
+            <a:pPr marL="0" indent="0">
+              <a:buNone/>
+            </a:pPr>
+            <a:r>
+              <a:rPr lang="en-US" b="1" dirty="0">
+                <a:highlight>
+                  <a:srgbClr val="FFFF00"/>
+                </a:highlight>
+              </a:rPr>
+              <a:t>Conclusion for an Engineer</a:t>
+            </a:r>
+            <a:r>
+              <a:rPr lang="en-US" b="1" dirty="0"/>
+              <a:t>:</a:t>
+            </a:r>
+            <a:r>
+              <a:rPr lang="en-US" dirty="0"/>
+              <a:t> If you are building a website, use </a:t>
+            </a:r>
+            <a:r>
+              <a:rPr lang="en-US" b="1" dirty="0"/>
+              <a:t>HTTP</a:t>
+            </a:r>
+            <a:r>
+              <a:rPr lang="en-US" dirty="0"/>
+              <a:t>. If you are building a high-speed trading bot, use </a:t>
+            </a:r>
+            <a:r>
+              <a:rPr lang="en-US" b="1" dirty="0" err="1"/>
+              <a:t>WebSockets</a:t>
+            </a:r>
+            <a:r>
+              <a:rPr lang="en-US" dirty="0"/>
+              <a:t>. Since you are building an </a:t>
+            </a:r>
+            <a:r>
+              <a:rPr lang="en-US" b="1" dirty="0"/>
+              <a:t>embedded hardware system (Heater)</a:t>
+            </a:r>
+            <a:r>
+              <a:rPr lang="en-US" dirty="0"/>
+              <a:t>, you have chosen the industry standard: </a:t>
+            </a:r>
+            <a:r>
+              <a:rPr lang="en-US" b="1" dirty="0"/>
+              <a:t>MQTT</a:t>
+            </a:r>
+            <a:r>
+              <a:rPr lang="en-US" dirty="0"/>
+              <a:t>.</a:t>
+            </a:r>
+          </a:p>
+          <a:p>
+            <a:endParaRPr lang="fr-CH" dirty="0"/>
+          </a:p>
+        </p:txBody>
+      </p:sp>
+    </p:spTree>
+    <p:extLst>
+      <p:ext uri="{BB962C8B-B14F-4D97-AF65-F5344CB8AC3E}">
+        <p14:creationId xmlns:p14="http://schemas.microsoft.com/office/powerpoint/2010/main" val="2050519100"/>
+      </p:ext>
+    </p:extLst>
+  </p:cSld>
+  <p:clrMapOvr>
+    <a:masterClrMapping/>
+  </p:clrMapOvr>
+</p:sld>
+</file>
+
 <file path=ppt/slides/slide2.xml><?xml version="1.0" encoding="utf-8"?>
 <p:sld xmlns:a="http://schemas.openxmlformats.org/drawingml/2006/main" xmlns:r="http://schemas.openxmlformats.org/officeDocument/2006/relationships" xmlns:p="http://schemas.openxmlformats.org/presentationml/2006/main">
   <p:cSld>
@@ -7535,6 +11342,402 @@
     <p:extLst>
       <p:ext uri="{BB962C8B-B14F-4D97-AF65-F5344CB8AC3E}">
         <p14:creationId xmlns:p14="http://schemas.microsoft.com/office/powerpoint/2010/main" val="640897670"/>
+      </p:ext>
+    </p:extLst>
+  </p:cSld>
+  <p:clrMapOvr>
+    <a:masterClrMapping/>
+  </p:clrMapOvr>
+</p:sld>
+</file>
+
+<file path=ppt/slides/slide9.xml><?xml version="1.0" encoding="utf-8"?>
+<p:sld xmlns:a="http://schemas.openxmlformats.org/drawingml/2006/main" xmlns:r="http://schemas.openxmlformats.org/officeDocument/2006/relationships" xmlns:p="http://schemas.openxmlformats.org/presentationml/2006/main">
+  <p:cSld>
+    <p:spTree>
+      <p:nvGrpSpPr>
+        <p:cNvPr id="1" name=""/>
+        <p:cNvGrpSpPr/>
+        <p:nvPr/>
+      </p:nvGrpSpPr>
+      <p:grpSpPr>
+        <a:xfrm>
+          <a:off x="0" y="0"/>
+          <a:ext cx="0" cy="0"/>
+          <a:chOff x="0" y="0"/>
+          <a:chExt cx="0" cy="0"/>
+        </a:xfrm>
+      </p:grpSpPr>
+      <p:sp>
+        <p:nvSpPr>
+          <p:cNvPr id="2" name="Titre 1">
+            <a:extLst>
+              <a:ext uri="{FF2B5EF4-FFF2-40B4-BE49-F238E27FC236}">
+                <a16:creationId xmlns:a16="http://schemas.microsoft.com/office/drawing/2014/main" id="{5A979F86-65E7-0FEF-5CB0-145BCF637F75}"/>
+              </a:ext>
+            </a:extLst>
+          </p:cNvPr>
+          <p:cNvSpPr>
+            <a:spLocks noGrp="1"/>
+          </p:cNvSpPr>
+          <p:nvPr>
+            <p:ph type="title"/>
+          </p:nvPr>
+        </p:nvSpPr>
+        <p:spPr/>
+        <p:txBody>
+          <a:bodyPr/>
+          <a:lstStyle/>
+          <a:p>
+            <a:r>
+              <a:rPr lang="fr-CH" dirty="0"/>
+              <a:t>SSL client </a:t>
+            </a:r>
+          </a:p>
+        </p:txBody>
+      </p:sp>
+      <p:sp>
+        <p:nvSpPr>
+          <p:cNvPr id="3" name="Espace réservé du contenu 2">
+            <a:extLst>
+              <a:ext uri="{FF2B5EF4-FFF2-40B4-BE49-F238E27FC236}">
+                <a16:creationId xmlns:a16="http://schemas.microsoft.com/office/drawing/2014/main" id="{C53F8449-D990-6235-DB81-2DFC9BDBFB76}"/>
+              </a:ext>
+            </a:extLst>
+          </p:cNvPr>
+          <p:cNvSpPr>
+            <a:spLocks noGrp="1"/>
+          </p:cNvSpPr>
+          <p:nvPr>
+            <p:ph idx="1"/>
+          </p:nvPr>
+        </p:nvSpPr>
+        <p:spPr>
+          <a:xfrm>
+            <a:off x="838200" y="1490870"/>
+            <a:ext cx="10515600" cy="5367130"/>
+          </a:xfrm>
+        </p:spPr>
+        <p:txBody>
+          <a:bodyPr>
+            <a:normAutofit fontScale="32500" lnSpcReduction="20000"/>
+          </a:bodyPr>
+          <a:lstStyle/>
+          <a:p>
+            <a:r>
+              <a:rPr lang="en-US" dirty="0"/>
+              <a:t>An </a:t>
+            </a:r>
+            <a:r>
+              <a:rPr lang="en-US" b="1" dirty="0"/>
+              <a:t>SSL </a:t>
+            </a:r>
+            <a:r>
+              <a:rPr lang="en-US" b="1" dirty="0" err="1"/>
+              <a:t>WiFi</a:t>
+            </a:r>
+            <a:r>
+              <a:rPr lang="en-US" b="1" dirty="0"/>
+              <a:t> Client</a:t>
+            </a:r>
+            <a:r>
+              <a:rPr lang="en-US" dirty="0"/>
+              <a:t> (like the </a:t>
+            </a:r>
+            <a:r>
+              <a:rPr lang="en-US" dirty="0" err="1"/>
+              <a:t>WiFiSSLClient</a:t>
+            </a:r>
+            <a:r>
+              <a:rPr lang="en-US" dirty="0"/>
+              <a:t> you used in your code) is a specialized tool that allows your Arduino to communicate with the internet using </a:t>
+            </a:r>
+            <a:r>
+              <a:rPr lang="en-US" b="1" dirty="0"/>
+              <a:t>encryption</a:t>
+            </a:r>
+            <a:r>
+              <a:rPr lang="en-US" dirty="0"/>
+              <a:t>.</a:t>
+            </a:r>
+          </a:p>
+          <a:p>
+            <a:r>
+              <a:rPr lang="en-US" dirty="0"/>
+              <a:t>In your project, when you connect to </a:t>
+            </a:r>
+            <a:r>
+              <a:rPr lang="en-US" b="1" dirty="0" err="1"/>
+              <a:t>HiveMQ</a:t>
+            </a:r>
+            <a:r>
+              <a:rPr lang="en-US" b="1" dirty="0"/>
+              <a:t> Cloud</a:t>
+            </a:r>
+            <a:r>
+              <a:rPr lang="en-US" dirty="0"/>
+              <a:t>, you are sending data over the public internet. Without SSL, anyone sitting between your router and the cloud could "sniff" your </a:t>
+            </a:r>
+            <a:r>
+              <a:rPr lang="en-US" dirty="0" err="1"/>
+              <a:t>WiFi</a:t>
+            </a:r>
+            <a:r>
+              <a:rPr lang="en-US" dirty="0"/>
+              <a:t> password or your boiler's temperature data. SSL prevents this.</a:t>
+            </a:r>
+          </a:p>
+          <a:p>
+            <a:r>
+              <a:rPr lang="en-US" b="1" dirty="0"/>
+              <a:t>How it Works (The "Secret Handshake")</a:t>
+            </a:r>
+          </a:p>
+          <a:p>
+            <a:r>
+              <a:rPr lang="en-US" dirty="0"/>
+              <a:t>Think of a standard WiFiClient as sending a postcard—anyone can read it. A </a:t>
+            </a:r>
+            <a:r>
+              <a:rPr lang="en-US" dirty="0" err="1"/>
+              <a:t>WiFiSSLClient</a:t>
+            </a:r>
+            <a:r>
+              <a:rPr lang="en-US" dirty="0"/>
+              <a:t> is like sending a locked safe that only the recipient can open.</a:t>
+            </a:r>
+          </a:p>
+          <a:p>
+            <a:r>
+              <a:rPr lang="en-US" b="1" dirty="0"/>
+              <a:t>The Handshake:</a:t>
+            </a:r>
+            <a:r>
+              <a:rPr lang="en-US" dirty="0"/>
+              <a:t> When your Arduino starts the connection, it asks the server for a </a:t>
+            </a:r>
+            <a:r>
+              <a:rPr lang="en-US" b="1" dirty="0"/>
+              <a:t>Certificate</a:t>
+            </a:r>
+            <a:r>
+              <a:rPr lang="en-US" dirty="0"/>
+              <a:t>.</a:t>
+            </a:r>
+          </a:p>
+          <a:p>
+            <a:r>
+              <a:rPr lang="en-US" b="1" dirty="0"/>
+              <a:t>Verification:</a:t>
+            </a:r>
+            <a:r>
+              <a:rPr lang="en-US" dirty="0"/>
+              <a:t> The Arduino checks this certificate to ensure it’s actually talking to </a:t>
+            </a:r>
+            <a:r>
+              <a:rPr lang="en-US" dirty="0" err="1"/>
+              <a:t>HiveMQ</a:t>
+            </a:r>
+            <a:r>
+              <a:rPr lang="en-US" dirty="0"/>
+              <a:t> and not a hacker.</a:t>
+            </a:r>
+          </a:p>
+          <a:p>
+            <a:r>
+              <a:rPr lang="en-US" b="1" dirty="0"/>
+              <a:t>Encryption:</a:t>
+            </a:r>
+            <a:r>
+              <a:rPr lang="en-US" dirty="0"/>
+              <a:t> They agree on a "secret key." All data sent after this point is scrambled into unreadable gibberish.</a:t>
+            </a:r>
+          </a:p>
+          <a:p>
+            <a:r>
+              <a:rPr lang="en-US" b="1" dirty="0"/>
+              <a:t>Decryption:</a:t>
+            </a:r>
+            <a:r>
+              <a:rPr lang="en-US" dirty="0"/>
+              <a:t> The server uses its key to turn that gibberish back into your JSON data</a:t>
+            </a:r>
+            <a:br>
+              <a:rPr lang="en-US" dirty="0"/>
+            </a:br>
+            <a:endParaRPr lang="en-US" dirty="0"/>
+          </a:p>
+          <a:p>
+            <a:r>
+              <a:rPr lang="en-US" b="1" dirty="0"/>
+              <a:t>Why the Uno R4 handles this differently</a:t>
+            </a:r>
+          </a:p>
+          <a:p>
+            <a:r>
+              <a:rPr lang="en-US" dirty="0"/>
+              <a:t>On older Arduinos (like the Uno R3), SSL was almost impossible because it requires a lot of math and memory (RAM). The </a:t>
+            </a:r>
+            <a:r>
+              <a:rPr lang="en-US" b="1" dirty="0"/>
+              <a:t>Uno R4 </a:t>
+            </a:r>
+            <a:r>
+              <a:rPr lang="en-US" b="1" dirty="0" err="1"/>
+              <a:t>WiFi</a:t>
+            </a:r>
+            <a:r>
+              <a:rPr lang="en-US" dirty="0"/>
+              <a:t> is special because it has two processors:</a:t>
+            </a:r>
+          </a:p>
+          <a:p>
+            <a:r>
+              <a:rPr lang="en-US" b="1" dirty="0"/>
+              <a:t>The Renesas RA4M1:</a:t>
+            </a:r>
+            <a:r>
+              <a:rPr lang="en-US" dirty="0"/>
+              <a:t> This runs your actual Arduino code (your loop and setup).</a:t>
+            </a:r>
+          </a:p>
+          <a:p>
+            <a:r>
+              <a:rPr lang="en-US" b="1" dirty="0"/>
+              <a:t>The ESP32-S3:</a:t>
+            </a:r>
+            <a:r>
+              <a:rPr lang="en-US" dirty="0"/>
+              <a:t> This is a separate "co-processor" dedicated to </a:t>
+            </a:r>
+            <a:r>
+              <a:rPr lang="en-US" dirty="0" err="1"/>
+              <a:t>WiFi</a:t>
+            </a:r>
+            <a:r>
+              <a:rPr lang="en-US" dirty="0"/>
+              <a:t> and Bluetooth.</a:t>
+            </a:r>
+          </a:p>
+          <a:p>
+            <a:r>
+              <a:rPr lang="en-US" dirty="0"/>
+              <a:t>When you use </a:t>
+            </a:r>
+            <a:r>
+              <a:rPr lang="en-US" dirty="0" err="1"/>
+              <a:t>WiFiSSLClient</a:t>
+            </a:r>
+            <a:r>
+              <a:rPr lang="en-US" dirty="0"/>
+              <a:t>, your main code tells the ESP32: </a:t>
+            </a:r>
+            <a:r>
+              <a:rPr lang="en-US" i="1" dirty="0"/>
+              <a:t>"Hey, I need a secure tunnel to this address."</a:t>
+            </a:r>
+            <a:r>
+              <a:rPr lang="en-US" dirty="0"/>
+              <a:t> The ESP32 does all the heavy mathematical lifting of the encryption so the main processor can focus on your heater logic.</a:t>
+            </a:r>
+            <a:br>
+              <a:rPr lang="en-US" dirty="0"/>
+            </a:br>
+            <a:endParaRPr lang="en-US" dirty="0"/>
+          </a:p>
+          <a:p>
+            <a:r>
+              <a:rPr lang="en-US" b="1" dirty="0"/>
+              <a:t>Important SSL Parameters in your Project</a:t>
+            </a:r>
+          </a:p>
+          <a:p>
+            <a:r>
+              <a:rPr lang="en-US" b="1" dirty="0"/>
+              <a:t>Port 8883:</a:t>
+            </a:r>
+            <a:r>
+              <a:rPr lang="en-US" dirty="0"/>
+              <a:t> This is the standard port for </a:t>
+            </a:r>
+            <a:r>
+              <a:rPr lang="en-US" b="1" dirty="0"/>
+              <a:t>Secure MQTT</a:t>
+            </a:r>
+            <a:r>
+              <a:rPr lang="en-US" dirty="0"/>
+              <a:t>. If you were not using SSL, you would typically use port 1883.</a:t>
+            </a:r>
+          </a:p>
+          <a:p>
+            <a:r>
+              <a:rPr lang="en-US" b="1" dirty="0"/>
+              <a:t>Overhead:</a:t>
+            </a:r>
+            <a:r>
+              <a:rPr lang="en-US" dirty="0"/>
+              <a:t> Because of the encryption math, SSL messages are slightly larger than "Plaintext" messages. This is why connecting sometimes takes 1–3 seconds longer than a normal connection—the "Handshake" takes time.</a:t>
+            </a:r>
+          </a:p>
+          <a:p>
+            <a:r>
+              <a:rPr lang="en-US" b="1" dirty="0"/>
+              <a:t>Root Certificates:</a:t>
+            </a:r>
+            <a:r>
+              <a:rPr lang="en-US" dirty="0"/>
+              <a:t> Sometimes, the Arduino needs a "Root CA" (a master key) to trust the server. The Uno R4 usually handles this automatically through its firmware, but for high-security industrial systems, you sometimes have to manually "flash" these certificates to the </a:t>
+            </a:r>
+            <a:r>
+              <a:rPr lang="en-US" dirty="0" err="1"/>
+              <a:t>WiFi</a:t>
+            </a:r>
+            <a:r>
+              <a:rPr lang="en-US" dirty="0"/>
+              <a:t> module.</a:t>
+            </a:r>
+            <a:br>
+              <a:rPr lang="en-US" dirty="0"/>
+            </a:br>
+            <a:endParaRPr lang="en-US" dirty="0"/>
+          </a:p>
+          <a:p>
+            <a:r>
+              <a:rPr lang="en-US" b="1" dirty="0"/>
+              <a:t>Is it necessary?</a:t>
+            </a:r>
+          </a:p>
+          <a:p>
+            <a:r>
+              <a:rPr lang="en-US" dirty="0"/>
+              <a:t>For a </a:t>
+            </a:r>
+            <a:r>
+              <a:rPr lang="en-US" b="1" dirty="0"/>
+              <a:t>Heater Project</a:t>
+            </a:r>
+            <a:r>
+              <a:rPr lang="en-US" dirty="0"/>
+              <a:t>, absolutely. If someone were to intercept your MQTT messages and send a fake command to your boiler, they could potentially cause physical damage. SSL ensures that the only person controlling that heater is </a:t>
+            </a:r>
+            <a:r>
+              <a:rPr lang="en-US" b="1" dirty="0"/>
+              <a:t>you</a:t>
+            </a:r>
+            <a:r>
+              <a:rPr lang="en-US" dirty="0"/>
+              <a:t> (or your server).</a:t>
+            </a:r>
+          </a:p>
+          <a:p>
+            <a:endParaRPr lang="fr-CH" dirty="0"/>
+          </a:p>
+        </p:txBody>
+      </p:sp>
+    </p:spTree>
+    <p:extLst>
+      <p:ext uri="{BB962C8B-B14F-4D97-AF65-F5344CB8AC3E}">
+        <p14:creationId xmlns:p14="http://schemas.microsoft.com/office/powerpoint/2010/main" val="811863494"/>
       </p:ext>
     </p:extLst>
   </p:cSld>
@@ -7837,4 +12040,299 @@
     </a:ext>
   </a:extLst>
 </a:theme>
+</file>
+
+<file path=ppt/theme/theme2.xml><?xml version="1.0" encoding="utf-8"?>
+<a:theme xmlns:a="http://schemas.openxmlformats.org/drawingml/2006/main" name="Thème Office">
+  <a:themeElements>
+    <a:clrScheme name="Office">
+      <a:dk1>
+        <a:sysClr val="windowText" lastClr="000000"/>
+      </a:dk1>
+      <a:lt1>
+        <a:sysClr val="window" lastClr="FFFFFF"/>
+      </a:lt1>
+      <a:dk2>
+        <a:srgbClr val="44546A"/>
+      </a:dk2>
+      <a:lt2>
+        <a:srgbClr val="E7E6E6"/>
+      </a:lt2>
+      <a:accent1>
+        <a:srgbClr val="4472C4"/>
+      </a:accent1>
+      <a:accent2>
+        <a:srgbClr val="ED7D31"/>
+      </a:accent2>
+      <a:accent3>
+        <a:srgbClr val="A5A5A5"/>
+      </a:accent3>
+      <a:accent4>
+        <a:srgbClr val="FFC000"/>
+      </a:accent4>
+      <a:accent5>
+        <a:srgbClr val="5B9BD5"/>
+      </a:accent5>
+      <a:accent6>
+        <a:srgbClr val="70AD47"/>
+      </a:accent6>
+      <a:hlink>
+        <a:srgbClr val="0563C1"/>
+      </a:hlink>
+      <a:folHlink>
+        <a:srgbClr val="954F72"/>
+      </a:folHlink>
+    </a:clrScheme>
+    <a:fontScheme name="Office">
+      <a:majorFont>
+        <a:latin typeface="Calibri Light" panose="020F0302020204030204"/>
+        <a:ea typeface=""/>
+        <a:cs typeface=""/>
+        <a:font script="Jpan" typeface="游ゴシック Light"/>
+        <a:font script="Hang" typeface="맑은 고딕"/>
+        <a:font script="Hans" typeface="等线 Light"/>
+        <a:font script="Hant" typeface="新細明體"/>
+        <a:font script="Arab" typeface="Times New Roman"/>
+        <a:font script="Hebr" typeface="Times New Roman"/>
+        <a:font script="Thai" typeface="Angsana New"/>
+        <a:font script="Ethi" typeface="Nyala"/>
+        <a:font script="Beng" typeface="Vrinda"/>
+        <a:font script="Gujr" typeface="Shruti"/>
+        <a:font script="Khmr" typeface="MoolBoran"/>
+        <a:font script="Knda" typeface="Tunga"/>
+        <a:font script="Guru" typeface="Raavi"/>
+        <a:font script="Cans" typeface="Euphemia"/>
+        <a:font script="Cher" typeface="Plantagenet Cherokee"/>
+        <a:font script="Yiii" typeface="Microsoft Yi Baiti"/>
+        <a:font script="Tibt" typeface="Microsoft Himalaya"/>
+        <a:font script="Thaa" typeface="MV Boli"/>
+        <a:font script="Deva" typeface="Mangal"/>
+        <a:font script="Telu" typeface="Gautami"/>
+        <a:font script="Taml" typeface="Latha"/>
+        <a:font script="Syrc" typeface="Estrangelo Edessa"/>
+        <a:font script="Orya" typeface="Kalinga"/>
+        <a:font script="Mlym" typeface="Kartika"/>
+        <a:font script="Laoo" typeface="DokChampa"/>
+        <a:font script="Sinh" typeface="Iskoola Pota"/>
+        <a:font script="Mong" typeface="Mongolian Baiti"/>
+        <a:font script="Viet" typeface="Times New Roman"/>
+        <a:font script="Uigh" typeface="Microsoft Uighur"/>
+        <a:font script="Geor" typeface="Sylfaen"/>
+        <a:font script="Armn" typeface="Arial"/>
+        <a:font script="Bugi" typeface="Leelawadee UI"/>
+        <a:font script="Bopo" typeface="Microsoft JhengHei"/>
+        <a:font script="Java" typeface="Javanese Text"/>
+        <a:font script="Lisu" typeface="Segoe UI"/>
+        <a:font script="Mymr" typeface="Myanmar Text"/>
+        <a:font script="Nkoo" typeface="Ebrima"/>
+        <a:font script="Olck" typeface="Nirmala UI"/>
+        <a:font script="Osma" typeface="Ebrima"/>
+        <a:font script="Phag" typeface="Phagspa"/>
+        <a:font script="Syrn" typeface="Estrangelo Edessa"/>
+        <a:font script="Syrj" typeface="Estrangelo Edessa"/>
+        <a:font script="Syre" typeface="Estrangelo Edessa"/>
+        <a:font script="Sora" typeface="Nirmala UI"/>
+        <a:font script="Tale" typeface="Microsoft Tai Le"/>
+        <a:font script="Talu" typeface="Microsoft New Tai Lue"/>
+        <a:font script="Tfng" typeface="Ebrima"/>
+      </a:majorFont>
+      <a:minorFont>
+        <a:latin typeface="Calibri" panose="020F0502020204030204"/>
+        <a:ea typeface=""/>
+        <a:cs typeface=""/>
+        <a:font script="Jpan" typeface="游ゴシック"/>
+        <a:font script="Hang" typeface="맑은 고딕"/>
+        <a:font script="Hans" typeface="等线"/>
+        <a:font script="Hant" typeface="新細明體"/>
+        <a:font script="Arab" typeface="Arial"/>
+        <a:font script="Hebr" typeface="Arial"/>
+        <a:font script="Thai" typeface="Cordia New"/>
+        <a:font script="Ethi" typeface="Nyala"/>
+        <a:font script="Beng" typeface="Vrinda"/>
+        <a:font script="Gujr" typeface="Shruti"/>
+        <a:font script="Khmr" typeface="DaunPenh"/>
+        <a:font script="Knda" typeface="Tunga"/>
+        <a:font script="Guru" typeface="Raavi"/>
+        <a:font script="Cans" typeface="Euphemia"/>
+        <a:font script="Cher" typeface="Plantagenet Cherokee"/>
+        <a:font script="Yiii" typeface="Microsoft Yi Baiti"/>
+        <a:font script="Tibt" typeface="Microsoft Himalaya"/>
+        <a:font script="Thaa" typeface="MV Boli"/>
+        <a:font script="Deva" typeface="Mangal"/>
+        <a:font script="Telu" typeface="Gautami"/>
+        <a:font script="Taml" typeface="Latha"/>
+        <a:font script="Syrc" typeface="Estrangelo Edessa"/>
+        <a:font script="Orya" typeface="Kalinga"/>
+        <a:font script="Mlym" typeface="Kartika"/>
+        <a:font script="Laoo" typeface="DokChampa"/>
+        <a:font script="Sinh" typeface="Iskoola Pota"/>
+        <a:font script="Mong" typeface="Mongolian Baiti"/>
+        <a:font script="Viet" typeface="Arial"/>
+        <a:font script="Uigh" typeface="Microsoft Uighur"/>
+        <a:font script="Geor" typeface="Sylfaen"/>
+        <a:font script="Armn" typeface="Arial"/>
+        <a:font script="Bugi" typeface="Leelawadee UI"/>
+        <a:font script="Bopo" typeface="Microsoft JhengHei"/>
+        <a:font script="Java" typeface="Javanese Text"/>
+        <a:font script="Lisu" typeface="Segoe UI"/>
+        <a:font script="Mymr" typeface="Myanmar Text"/>
+        <a:font script="Nkoo" typeface="Ebrima"/>
+        <a:font script="Olck" typeface="Nirmala UI"/>
+        <a:font script="Osma" typeface="Ebrima"/>
+        <a:font script="Phag" typeface="Phagspa"/>
+        <a:font script="Syrn" typeface="Estrangelo Edessa"/>
+        <a:font script="Syrj" typeface="Estrangelo Edessa"/>
+        <a:font script="Syre" typeface="Estrangelo Edessa"/>
+        <a:font script="Sora" typeface="Nirmala UI"/>
+        <a:font script="Tale" typeface="Microsoft Tai Le"/>
+        <a:font script="Talu" typeface="Microsoft New Tai Lue"/>
+        <a:font script="Tfng" typeface="Ebrima"/>
+      </a:minorFont>
+    </a:fontScheme>
+    <a:fmtScheme name="Office">
+      <a:fillStyleLst>
+        <a:solidFill>
+          <a:schemeClr val="phClr"/>
+        </a:solidFill>
+        <a:gradFill rotWithShape="1">
+          <a:gsLst>
+            <a:gs pos="0">
+              <a:schemeClr val="phClr">
+                <a:lumMod val="110000"/>
+                <a:satMod val="105000"/>
+                <a:tint val="67000"/>
+              </a:schemeClr>
+            </a:gs>
+            <a:gs pos="50000">
+              <a:schemeClr val="phClr">
+                <a:lumMod val="105000"/>
+                <a:satMod val="103000"/>
+                <a:tint val="73000"/>
+              </a:schemeClr>
+            </a:gs>
+            <a:gs pos="100000">
+              <a:schemeClr val="phClr">
+                <a:lumMod val="105000"/>
+                <a:satMod val="109000"/>
+                <a:tint val="81000"/>
+              </a:schemeClr>
+            </a:gs>
+          </a:gsLst>
+          <a:lin ang="5400000" scaled="0"/>
+        </a:gradFill>
+        <a:gradFill rotWithShape="1">
+          <a:gsLst>
+            <a:gs pos="0">
+              <a:schemeClr val="phClr">
+                <a:satMod val="103000"/>
+                <a:lumMod val="102000"/>
+                <a:tint val="94000"/>
+              </a:schemeClr>
+            </a:gs>
+            <a:gs pos="50000">
+              <a:schemeClr val="phClr">
+                <a:satMod val="110000"/>
+                <a:lumMod val="100000"/>
+                <a:shade val="100000"/>
+              </a:schemeClr>
+            </a:gs>
+            <a:gs pos="100000">
+              <a:schemeClr val="phClr">
+                <a:lumMod val="99000"/>
+                <a:satMod val="120000"/>
+                <a:shade val="78000"/>
+              </a:schemeClr>
+            </a:gs>
+          </a:gsLst>
+          <a:lin ang="5400000" scaled="0"/>
+        </a:gradFill>
+      </a:fillStyleLst>
+      <a:lnStyleLst>
+        <a:ln w="6350" cap="flat" cmpd="sng" algn="ctr">
+          <a:solidFill>
+            <a:schemeClr val="phClr"/>
+          </a:solidFill>
+          <a:prstDash val="solid"/>
+          <a:miter lim="800000"/>
+        </a:ln>
+        <a:ln w="12700" cap="flat" cmpd="sng" algn="ctr">
+          <a:solidFill>
+            <a:schemeClr val="phClr"/>
+          </a:solidFill>
+          <a:prstDash val="solid"/>
+          <a:miter lim="800000"/>
+        </a:ln>
+        <a:ln w="19050" cap="flat" cmpd="sng" algn="ctr">
+          <a:solidFill>
+            <a:schemeClr val="phClr"/>
+          </a:solidFill>
+          <a:prstDash val="solid"/>
+          <a:miter lim="800000"/>
+        </a:ln>
+      </a:lnStyleLst>
+      <a:effectStyleLst>
+        <a:effectStyle>
+          <a:effectLst/>
+        </a:effectStyle>
+        <a:effectStyle>
+          <a:effectLst/>
+        </a:effectStyle>
+        <a:effectStyle>
+          <a:effectLst>
+            <a:outerShdw blurRad="57150" dist="19050" dir="5400000" algn="ctr" rotWithShape="0">
+              <a:srgbClr val="000000">
+                <a:alpha val="63000"/>
+              </a:srgbClr>
+            </a:outerShdw>
+          </a:effectLst>
+        </a:effectStyle>
+      </a:effectStyleLst>
+      <a:bgFillStyleLst>
+        <a:solidFill>
+          <a:schemeClr val="phClr"/>
+        </a:solidFill>
+        <a:solidFill>
+          <a:schemeClr val="phClr">
+            <a:tint val="95000"/>
+            <a:satMod val="170000"/>
+          </a:schemeClr>
+        </a:solidFill>
+        <a:gradFill rotWithShape="1">
+          <a:gsLst>
+            <a:gs pos="0">
+              <a:schemeClr val="phClr">
+                <a:tint val="93000"/>
+                <a:satMod val="150000"/>
+                <a:shade val="98000"/>
+                <a:lumMod val="102000"/>
+              </a:schemeClr>
+            </a:gs>
+            <a:gs pos="50000">
+              <a:schemeClr val="phClr">
+                <a:tint val="98000"/>
+                <a:satMod val="130000"/>
+                <a:shade val="90000"/>
+                <a:lumMod val="103000"/>
+              </a:schemeClr>
+            </a:gs>
+            <a:gs pos="100000">
+              <a:schemeClr val="phClr">
+                <a:shade val="63000"/>
+                <a:satMod val="120000"/>
+              </a:schemeClr>
+            </a:gs>
+          </a:gsLst>
+          <a:lin ang="5400000" scaled="0"/>
+        </a:gradFill>
+      </a:bgFillStyleLst>
+    </a:fmtScheme>
+  </a:themeElements>
+  <a:objectDefaults/>
+  <a:extraClrSchemeLst/>
+  <a:extLst>
+    <a:ext uri="{05A4C25C-085E-4340-85A3-A5531E510DB2}">
+      <thm15:themeFamily xmlns:thm15="http://schemas.microsoft.com/office/thememl/2012/main" name="Office Theme" id="{62F939B6-93AF-4DB8-9C6B-D6C7DFDC589F}" vid="{4A3C46E8-61CC-4603-A589-7422A47A8E4A}"/>
+    </a:ext>
+  </a:extLst>
+</a:theme>
 </file>